--- a/docs/reviews/zeroth-review/Predictive_BMS_Zeroth_Review.pptx
+++ b/docs/reviews/zeroth-review/Predictive_BMS_Zeroth_Review.pptx
@@ -13,6 +13,7 @@
     <p:sldId id="261" r:id="rId13"/>
     <p:sldId id="262" r:id="rId14"/>
     <p:sldId id="263" r:id="rId15"/>
+    <p:sldId id="264" r:id="rId16"/>
   </p:sldIdLst>
   <p:sldSz cx="12191695" cy="6858000" type="screen4x3"/>
   <p:notesSz cx="6858000" cy="9144000"/>
@@ -964,32 +965,37 @@
           <a:lstStyle/>
           <a:p>
             <a:r>
-              <a:t>These five sources shaped the project. The first explains the physics: the heat</a:t>
-            </a:r>
-          </a:p>
-          <a:p>
-            <a:r>
-              <a:t>inside a cell feeds more reaction, which makes more heat, so the temperature</a:t>
-            </a:r>
-          </a:p>
-          <a:p>
-            <a:r>
-              <a:t>curve bends upward sharply. The second and fourth show that early warning is a</a:t>
-            </a:r>
-          </a:p>
-          <a:p>
-            <a:r>
-              <a:t>known open problem. The third is the closest work to mine and is where the one</a:t>
-            </a:r>
-          </a:p>
-          <a:p>
-            <a:r>
-              <a:t>degree per second figure comes from. The last is the standard my design is aimed</a:t>
-            </a:r>
-          </a:p>
-          <a:p>
-            <a:r>
-              <a:t>at, although I am not claiming certification.</a:t>
+              <a:t>This project is not one or the other. There is a circuit to build and there is</a:t>
+            </a:r>
+          </a:p>
+          <a:p>
+            <a:r>
+              <a:t>firmware to write for it, and neither works without the other. The hardware side</a:t>
+            </a:r>
+          </a:p>
+          <a:p>
+            <a:r>
+              <a:t>is the pack, the sensing, the protection MOSFETs and the enclosure. The software</a:t>
+            </a:r>
+          </a:p>
+          <a:p>
+            <a:r>
+              <a:t>side is the firmware on the ESP32 and the dashboard page. The firmware is</a:t>
+            </a:r>
+          </a:p>
+          <a:p>
+            <a:r>
+              <a:t>written in C++ on ESP-IDF, which is the framework Espressif supply for the</a:t>
+            </a:r>
+          </a:p>
+          <a:p>
+            <a:r>
+              <a:t>ESP32, and it uses FreeRTOS underneath to keep the sensor, safety and telemetry</a:t>
+            </a:r>
+          </a:p>
+          <a:p>
+            <a:r>
+              <a:t>work in separate tasks.</a:t>
             </a:r>
           </a:p>
         </p:txBody>
@@ -1059,22 +1065,32 @@
           <a:lstStyle/>
           <a:p>
             <a:r>
-              <a:t>These are the five sources, numbered in the same order as the survey table on</a:t>
-            </a:r>
-          </a:p>
-          <a:p>
-            <a:r>
-              <a:t>the previous slide. The first four are papers and reviews. The fifth is the</a:t>
-            </a:r>
-          </a:p>
-          <a:p>
-            <a:r>
-              <a:t>Indian standard for sealed lithium cells, which sets out the abuse tests a pack</a:t>
-            </a:r>
-          </a:p>
-          <a:p>
-            <a:r>
-              <a:t>of this kind is expected to survive.</a:t>
+              <a:t>These five sources shaped the project. The first explains the physics: the heat</a:t>
+            </a:r>
+          </a:p>
+          <a:p>
+            <a:r>
+              <a:t>inside a cell feeds more reaction, which makes more heat, so the temperature</a:t>
+            </a:r>
+          </a:p>
+          <a:p>
+            <a:r>
+              <a:t>curve bends upward sharply. The second and fourth show that early warning is a</a:t>
+            </a:r>
+          </a:p>
+          <a:p>
+            <a:r>
+              <a:t>known open problem. The third is the closest work to mine and is where the one</a:t>
+            </a:r>
+          </a:p>
+          <a:p>
+            <a:r>
+              <a:t>degree per second figure comes from. The last is the standard my design is aimed</a:t>
+            </a:r>
+          </a:p>
+          <a:p>
+            <a:r>
+              <a:t>at, although I am not claiming certification.</a:t>
             </a:r>
           </a:p>
         </p:txBody>
@@ -1100,6 +1116,91 @@
 </file>
 
 <file path=ppt/notesSlides/notesSlide8.xml><?xml version="1.0" encoding="utf-8"?>
+<p:notes xmlns:a="http://schemas.openxmlformats.org/drawingml/2006/main" xmlns:p="http://schemas.openxmlformats.org/presentationml/2006/main" xmlns:r="http://schemas.openxmlformats.org/officeDocument/2006/relationships">
+  <p:cSld>
+    <p:spTree>
+      <p:nvGrpSpPr>
+        <p:cNvPr id="1" name=""/>
+        <p:cNvGrpSpPr/>
+        <p:nvPr/>
+      </p:nvGrpSpPr>
+      <p:grpSpPr>
+        <a:xfrm>
+          <a:off x="0" y="0"/>
+          <a:ext cx="0" cy="0"/>
+          <a:chOff x="0" y="0"/>
+          <a:chExt cx="0" cy="0"/>
+        </a:xfrm>
+      </p:grpSpPr>
+      <p:sp>
+        <p:nvSpPr>
+          <p:cNvPr id="2" name="Slide Image Placeholder 1"/>
+          <p:cNvSpPr>
+            <a:spLocks noGrp="1"/>
+          </p:cNvSpPr>
+          <p:nvPr>
+            <p:ph type="sldImg" idx="2"/>
+          </p:nvPr>
+        </p:nvSpPr>
+        <p:spPr/>
+      </p:sp>
+      <p:sp>
+        <p:nvSpPr>
+          <p:cNvPr id="3" name="Notes Placeholder 2"/>
+          <p:cNvSpPr>
+            <a:spLocks noGrp="1"/>
+          </p:cNvSpPr>
+          <p:nvPr>
+            <p:ph type="body" idx="3" sz="quarter"/>
+          </p:nvPr>
+        </p:nvSpPr>
+        <p:spPr/>
+        <p:txBody>
+          <a:bodyPr/>
+          <a:lstStyle/>
+          <a:p>
+            <a:r>
+              <a:t>These are the five sources, numbered in the same order as the survey table on</a:t>
+            </a:r>
+          </a:p>
+          <a:p>
+            <a:r>
+              <a:t>the previous slide. The first four are papers and reviews. The fifth is the</a:t>
+            </a:r>
+          </a:p>
+          <a:p>
+            <a:r>
+              <a:t>Indian standard for sealed lithium cells, which sets out the abuse tests a pack</a:t>
+            </a:r>
+          </a:p>
+          <a:p>
+            <a:r>
+              <a:t>of this kind is expected to survive.</a:t>
+            </a:r>
+          </a:p>
+        </p:txBody>
+      </p:sp>
+      <p:sp>
+        <p:nvSpPr>
+          <p:cNvPr id="4" name="Slide Number Placeholder 3"/>
+          <p:cNvSpPr>
+            <a:spLocks noGrp="1"/>
+          </p:cNvSpPr>
+          <p:nvPr>
+            <p:ph type="sldNum" idx="5" sz="quarter"/>
+          </p:nvPr>
+        </p:nvSpPr>
+        <p:spPr/>
+      </p:sp>
+    </p:spTree>
+  </p:cSld>
+  <p:clrMapOvr>
+    <a:masterClrMapping/>
+  </p:clrMapOvr>
+</p:notes>
+</file>
+
+<file path=ppt/notesSlides/notesSlide9.xml><?xml version="1.0" encoding="utf-8"?>
 <p:notes xmlns:a="http://schemas.openxmlformats.org/drawingml/2006/main" xmlns:p="http://schemas.openxmlformats.org/presentationml/2006/main" xmlns:r="http://schemas.openxmlformats.org/officeDocument/2006/relationships">
   <p:cSld>
     <p:spTree>
@@ -4752,7 +4853,7 @@
                 </a:solidFill>
                 <a:latin typeface="Times New Roman"/>
               </a:rPr>
-              <a:t>[1]  </a:t>
+              <a:t>1.  </a:t>
             </a:r>
             <a:r>
               <a:rPr sz="1800" b="0" i="0" u="none">
@@ -4781,7 +4882,7 @@
                 </a:solidFill>
                 <a:latin typeface="Times New Roman"/>
               </a:rPr>
-              <a:t>[2]  </a:t>
+              <a:t>2.  </a:t>
             </a:r>
             <a:r>
               <a:rPr sz="1800" b="0" i="0" u="none">
@@ -4810,7 +4911,7 @@
                 </a:solidFill>
                 <a:latin typeface="Times New Roman"/>
               </a:rPr>
-              <a:t>[3]  </a:t>
+              <a:t>3.  </a:t>
             </a:r>
             <a:r>
               <a:rPr sz="1800" b="0" i="0" u="none">
@@ -4839,7 +4940,7 @@
                 </a:solidFill>
                 <a:latin typeface="Times New Roman"/>
               </a:rPr>
-              <a:t>[4]  </a:t>
+              <a:t>4.  </a:t>
             </a:r>
             <a:r>
               <a:rPr sz="1800" b="0" i="0" u="none">
@@ -4868,7 +4969,7 @@
                 </a:solidFill>
                 <a:latin typeface="Times New Roman"/>
               </a:rPr>
-              <a:t>[5]  </a:t>
+              <a:t>5.  </a:t>
             </a:r>
             <a:r>
               <a:rPr sz="1800" b="0" i="0" u="none">
@@ -4877,7 +4978,7 @@
                 </a:solidFill>
                 <a:latin typeface="Times New Roman"/>
               </a:rPr>
-              <a:t>Literature Survey</a:t>
+              <a:t>Implementation and Tools</a:t>
             </a:r>
           </a:p>
           <a:p>
@@ -4897,7 +4998,36 @@
                 </a:solidFill>
                 <a:latin typeface="Times New Roman"/>
               </a:rPr>
-              <a:t>[6]  </a:t>
+              <a:t>6.  </a:t>
+            </a:r>
+            <a:r>
+              <a:rPr sz="1800" b="0" i="0" u="none">
+                <a:solidFill>
+                  <a:srgbClr val="000000"/>
+                </a:solidFill>
+                <a:latin typeface="Times New Roman"/>
+              </a:rPr>
+              <a:t>Literature Survey</a:t>
+            </a:r>
+          </a:p>
+          <a:p>
+            <a:pPr marL="384048" indent="-384048">
+              <a:lnSpc>
+                <a:spcPct val="110000"/>
+              </a:lnSpc>
+              <a:spcAft>
+                <a:spcPts val="1300"/>
+              </a:spcAft>
+              <a:buNone/>
+            </a:pPr>
+            <a:r>
+              <a:rPr sz="1800" b="0" i="0" u="none">
+                <a:solidFill>
+                  <a:srgbClr val="000000"/>
+                </a:solidFill>
+                <a:latin typeface="Times New Roman"/>
+              </a:rPr>
+              <a:t>7.  </a:t>
             </a:r>
             <a:r>
               <a:rPr sz="1800" b="0" i="0" u="none">
@@ -5937,7 +6067,7 @@
                 </a:solidFill>
                 <a:latin typeface="Times New Roman"/>
               </a:rPr>
-              <a:t>Literature Survey</a:t>
+              <a:t>Implementation and Tools</a:t>
             </a:r>
           </a:p>
         </p:txBody>
@@ -6042,6 +6172,959 @@
                 <a:latin typeface="Calibri"/>
               </a:rPr>
               <a:t>6</a:t>
+            </a:r>
+          </a:p>
+        </p:txBody>
+      </p:sp>
+      <p:sp>
+        <p:nvSpPr>
+          <p:cNvPr id="7" name="TextBox 6"/>
+          <p:cNvSpPr txBox="1"/>
+          <p:nvPr/>
+        </p:nvSpPr>
+        <p:spPr>
+          <a:xfrm>
+            <a:off x="1168603" y="1316736"/>
+            <a:ext cx="10195560" cy="420624"/>
+          </a:xfrm>
+          <a:prstGeom prst="rect">
+            <a:avLst/>
+          </a:prstGeom>
+          <a:noFill/>
+        </p:spPr>
+        <p:txBody>
+          <a:bodyPr wrap="square" lIns="0" rIns="0" tIns="0" bIns="0">
+            <a:noAutofit/>
+          </a:bodyPr>
+          <a:lstStyle/>
+          <a:p>
+            <a:pPr algn="ctr"/>
+            <a:r>
+              <a:rPr sz="1800" b="1" i="0" u="none">
+                <a:solidFill>
+                  <a:srgbClr val="000000"/>
+                </a:solidFill>
+                <a:latin typeface="Times New Roman"/>
+              </a:rPr>
+              <a:t>This project has a hardware part and a software part. Both are built here.</a:t>
+            </a:r>
+          </a:p>
+        </p:txBody>
+      </p:sp>
+      <p:graphicFrame>
+        <p:nvGraphicFramePr>
+          <p:cNvPr id="8" name="Table 7"/>
+          <p:cNvGraphicFramePr>
+            <a:graphicFrameLocks noGrp="1"/>
+          </p:cNvGraphicFramePr>
+          <p:nvPr/>
+        </p:nvGraphicFramePr>
+        <p:xfrm>
+          <a:off x="975207" y="1956816"/>
+          <a:ext cx="10241280" cy="4187952"/>
+        </p:xfrm>
+        <a:graphic>
+          <a:graphicData uri="http://schemas.openxmlformats.org/drawingml/2006/table">
+            <a:tbl>
+              <a:tblPr firstRow="1">
+                <a:tableStyleId>{5C22544A-7EE6-4342-B048-85BDC9FD1C3A}</a:tableStyleId>
+              </a:tblPr>
+              <a:tblGrid>
+                <a:gridCol w="1737360"/>
+                <a:gridCol w="2926080"/>
+                <a:gridCol w="5577840"/>
+              </a:tblGrid>
+              <a:tr h="418795">
+                <a:tc>
+                  <a:txBody>
+                    <a:bodyPr/>
+                    <a:lstStyle/>
+                    <a:p>
+                      <a:pPr algn="ctr"/>
+                      <a:r>
+                        <a:rPr sz="1500" b="1" i="0" u="none">
+                          <a:solidFill>
+                            <a:srgbClr val="FFFFFF"/>
+                          </a:solidFill>
+                          <a:latin typeface="Times New Roman"/>
+                        </a:rPr>
+                        <a:t>Side</a:t>
+                      </a:r>
+                    </a:p>
+                  </a:txBody>
+                  <a:tcPr anchor="ctr" marL="64008" marR="64008">
+                    <a:solidFill>
+                      <a:srgbClr val="002060"/>
+                    </a:solidFill>
+                  </a:tcPr>
+                </a:tc>
+                <a:tc>
+                  <a:txBody>
+                    <a:bodyPr/>
+                    <a:lstStyle/>
+                    <a:p>
+                      <a:pPr algn="ctr"/>
+                      <a:r>
+                        <a:rPr sz="1500" b="1" i="0" u="none">
+                          <a:solidFill>
+                            <a:srgbClr val="FFFFFF"/>
+                          </a:solidFill>
+                          <a:latin typeface="Times New Roman"/>
+                        </a:rPr>
+                        <a:t>Tool</a:t>
+                      </a:r>
+                    </a:p>
+                  </a:txBody>
+                  <a:tcPr anchor="ctr" marL="64008" marR="64008">
+                    <a:solidFill>
+                      <a:srgbClr val="002060"/>
+                    </a:solidFill>
+                  </a:tcPr>
+                </a:tc>
+                <a:tc>
+                  <a:txBody>
+                    <a:bodyPr/>
+                    <a:lstStyle/>
+                    <a:p>
+                      <a:pPr algn="ctr"/>
+                      <a:r>
+                        <a:rPr sz="1500" b="1" i="0" u="none">
+                          <a:solidFill>
+                            <a:srgbClr val="FFFFFF"/>
+                          </a:solidFill>
+                          <a:latin typeface="Times New Roman"/>
+                        </a:rPr>
+                        <a:t>What it is used for</a:t>
+                      </a:r>
+                    </a:p>
+                  </a:txBody>
+                  <a:tcPr anchor="ctr" marL="64008" marR="64008">
+                    <a:solidFill>
+                      <a:srgbClr val="002060"/>
+                    </a:solidFill>
+                  </a:tcPr>
+                </a:tc>
+              </a:tr>
+              <a:tr h="418795">
+                <a:tc>
+                  <a:txBody>
+                    <a:bodyPr/>
+                    <a:lstStyle/>
+                    <a:p>
+                      <a:pPr algn="ctr"/>
+                      <a:r>
+                        <a:rPr sz="1500" b="0" i="0" u="none">
+                          <a:solidFill>
+                            <a:srgbClr val="000000"/>
+                          </a:solidFill>
+                          <a:latin typeface="Times New Roman"/>
+                        </a:rPr>
+                        <a:t>Hardware</a:t>
+                      </a:r>
+                    </a:p>
+                  </a:txBody>
+                  <a:tcPr anchor="ctr" marL="64008" marR="64008" marT="27432" marB="27432">
+                    <a:solidFill>
+                      <a:srgbClr val="FFFFFF"/>
+                    </a:solidFill>
+                  </a:tcPr>
+                </a:tc>
+                <a:tc>
+                  <a:txBody>
+                    <a:bodyPr/>
+                    <a:lstStyle/>
+                    <a:p>
+                      <a:pPr algn="l"/>
+                      <a:r>
+                        <a:rPr sz="1500" b="0" i="0" u="none">
+                          <a:solidFill>
+                            <a:srgbClr val="000000"/>
+                          </a:solidFill>
+                          <a:latin typeface="Times New Roman"/>
+                        </a:rPr>
+                        <a:t>Siemens NX</a:t>
+                      </a:r>
+                    </a:p>
+                  </a:txBody>
+                  <a:tcPr anchor="ctr" marL="64008" marR="64008" marT="27432" marB="27432">
+                    <a:solidFill>
+                      <a:srgbClr val="FFFFFF"/>
+                    </a:solidFill>
+                  </a:tcPr>
+                </a:tc>
+                <a:tc>
+                  <a:txBody>
+                    <a:bodyPr/>
+                    <a:lstStyle/>
+                    <a:p>
+                      <a:pPr algn="l"/>
+                      <a:r>
+                        <a:rPr sz="1500" b="0" i="0" u="none">
+                          <a:solidFill>
+                            <a:srgbClr val="000000"/>
+                          </a:solidFill>
+                          <a:latin typeface="Times New Roman"/>
+                        </a:rPr>
+                        <a:t>Modelling the enclosure</a:t>
+                      </a:r>
+                    </a:p>
+                  </a:txBody>
+                  <a:tcPr anchor="ctr" marL="64008" marR="64008" marT="27432" marB="27432">
+                    <a:solidFill>
+                      <a:srgbClr val="FFFFFF"/>
+                    </a:solidFill>
+                  </a:tcPr>
+                </a:tc>
+              </a:tr>
+              <a:tr h="418795">
+                <a:tc>
+                  <a:txBody>
+                    <a:bodyPr/>
+                    <a:lstStyle/>
+                    <a:p>
+                      <a:pPr algn="ctr"/>
+                      <a:r>
+                        <a:rPr sz="1500" b="0" i="0" u="none">
+                          <a:solidFill>
+                            <a:srgbClr val="000000"/>
+                          </a:solidFill>
+                          <a:latin typeface="Times New Roman"/>
+                        </a:rPr>
+                        <a:t>Hardware</a:t>
+                      </a:r>
+                    </a:p>
+                  </a:txBody>
+                  <a:tcPr anchor="ctr" marL="64008" marR="64008" marT="27432" marB="27432">
+                    <a:solidFill>
+                      <a:srgbClr val="EDEDED"/>
+                    </a:solidFill>
+                  </a:tcPr>
+                </a:tc>
+                <a:tc>
+                  <a:txBody>
+                    <a:bodyPr/>
+                    <a:lstStyle/>
+                    <a:p>
+                      <a:pPr algn="l"/>
+                      <a:r>
+                        <a:rPr sz="1500" b="0" i="0" u="none">
+                          <a:solidFill>
+                            <a:srgbClr val="000000"/>
+                          </a:solidFill>
+                          <a:latin typeface="Times New Roman"/>
+                        </a:rPr>
+                        <a:t>3D printer, PLA+</a:t>
+                      </a:r>
+                    </a:p>
+                  </a:txBody>
+                  <a:tcPr anchor="ctr" marL="64008" marR="64008" marT="27432" marB="27432">
+                    <a:solidFill>
+                      <a:srgbClr val="EDEDED"/>
+                    </a:solidFill>
+                  </a:tcPr>
+                </a:tc>
+                <a:tc>
+                  <a:txBody>
+                    <a:bodyPr/>
+                    <a:lstStyle/>
+                    <a:p>
+                      <a:pPr algn="l"/>
+                      <a:r>
+                        <a:rPr sz="1500" b="0" i="0" u="none">
+                          <a:solidFill>
+                            <a:srgbClr val="000000"/>
+                          </a:solidFill>
+                          <a:latin typeface="Times New Roman"/>
+                        </a:rPr>
+                        <a:t>Printing the enclosure</a:t>
+                      </a:r>
+                    </a:p>
+                  </a:txBody>
+                  <a:tcPr anchor="ctr" marL="64008" marR="64008" marT="27432" marB="27432">
+                    <a:solidFill>
+                      <a:srgbClr val="EDEDED"/>
+                    </a:solidFill>
+                  </a:tcPr>
+                </a:tc>
+              </a:tr>
+              <a:tr h="418795">
+                <a:tc>
+                  <a:txBody>
+                    <a:bodyPr/>
+                    <a:lstStyle/>
+                    <a:p>
+                      <a:pPr algn="ctr"/>
+                      <a:r>
+                        <a:rPr sz="1500" b="0" i="0" u="none">
+                          <a:solidFill>
+                            <a:srgbClr val="000000"/>
+                          </a:solidFill>
+                          <a:latin typeface="Times New Roman"/>
+                        </a:rPr>
+                        <a:t>Hardware</a:t>
+                      </a:r>
+                    </a:p>
+                  </a:txBody>
+                  <a:tcPr anchor="ctr" marL="64008" marR="64008" marT="27432" marB="27432">
+                    <a:solidFill>
+                      <a:srgbClr val="FFFFFF"/>
+                    </a:solidFill>
+                  </a:tcPr>
+                </a:tc>
+                <a:tc>
+                  <a:txBody>
+                    <a:bodyPr/>
+                    <a:lstStyle/>
+                    <a:p>
+                      <a:pPr algn="l"/>
+                      <a:r>
+                        <a:rPr sz="1500" b="0" i="0" u="none">
+                          <a:solidFill>
+                            <a:srgbClr val="000000"/>
+                          </a:solidFill>
+                          <a:latin typeface="Times New Roman"/>
+                        </a:rPr>
+                        <a:t>Soldering station</a:t>
+                      </a:r>
+                    </a:p>
+                  </a:txBody>
+                  <a:tcPr anchor="ctr" marL="64008" marR="64008" marT="27432" marB="27432">
+                    <a:solidFill>
+                      <a:srgbClr val="FFFFFF"/>
+                    </a:solidFill>
+                  </a:tcPr>
+                </a:tc>
+                <a:tc>
+                  <a:txBody>
+                    <a:bodyPr/>
+                    <a:lstStyle/>
+                    <a:p>
+                      <a:pPr algn="l"/>
+                      <a:r>
+                        <a:rPr sz="1500" b="0" i="0" u="none">
+                          <a:solidFill>
+                            <a:srgbClr val="000000"/>
+                          </a:solidFill>
+                          <a:latin typeface="Times New Roman"/>
+                        </a:rPr>
+                        <a:t>Building the board, perfboard first, then a soldered PCB</a:t>
+                      </a:r>
+                    </a:p>
+                  </a:txBody>
+                  <a:tcPr anchor="ctr" marL="64008" marR="64008" marT="27432" marB="27432">
+                    <a:solidFill>
+                      <a:srgbClr val="FFFFFF"/>
+                    </a:solidFill>
+                  </a:tcPr>
+                </a:tc>
+              </a:tr>
+              <a:tr h="418795">
+                <a:tc>
+                  <a:txBody>
+                    <a:bodyPr/>
+                    <a:lstStyle/>
+                    <a:p>
+                      <a:pPr algn="ctr"/>
+                      <a:r>
+                        <a:rPr sz="1500" b="0" i="0" u="none">
+                          <a:solidFill>
+                            <a:srgbClr val="000000"/>
+                          </a:solidFill>
+                          <a:latin typeface="Times New Roman"/>
+                        </a:rPr>
+                        <a:t>Hardware</a:t>
+                      </a:r>
+                    </a:p>
+                  </a:txBody>
+                  <a:tcPr anchor="ctr" marL="64008" marR="64008" marT="27432" marB="27432">
+                    <a:solidFill>
+                      <a:srgbClr val="EDEDED"/>
+                    </a:solidFill>
+                  </a:tcPr>
+                </a:tc>
+                <a:tc>
+                  <a:txBody>
+                    <a:bodyPr/>
+                    <a:lstStyle/>
+                    <a:p>
+                      <a:pPr algn="l"/>
+                      <a:r>
+                        <a:rPr sz="1500" b="0" i="0" u="none">
+                          <a:solidFill>
+                            <a:srgbClr val="000000"/>
+                          </a:solidFill>
+                          <a:latin typeface="Times New Roman"/>
+                        </a:rPr>
+                        <a:t>Multimeter, bench supply</a:t>
+                      </a:r>
+                    </a:p>
+                  </a:txBody>
+                  <a:tcPr anchor="ctr" marL="64008" marR="64008" marT="27432" marB="27432">
+                    <a:solidFill>
+                      <a:srgbClr val="EDEDED"/>
+                    </a:solidFill>
+                  </a:tcPr>
+                </a:tc>
+                <a:tc>
+                  <a:txBody>
+                    <a:bodyPr/>
+                    <a:lstStyle/>
+                    <a:p>
+                      <a:pPr algn="l"/>
+                      <a:r>
+                        <a:rPr sz="1500" b="0" i="0" u="none">
+                          <a:solidFill>
+                            <a:srgbClr val="000000"/>
+                          </a:solidFill>
+                          <a:latin typeface="Times New Roman"/>
+                        </a:rPr>
+                        <a:t>Measuring and testing the circuit</a:t>
+                      </a:r>
+                    </a:p>
+                  </a:txBody>
+                  <a:tcPr anchor="ctr" marL="64008" marR="64008" marT="27432" marB="27432">
+                    <a:solidFill>
+                      <a:srgbClr val="EDEDED"/>
+                    </a:solidFill>
+                  </a:tcPr>
+                </a:tc>
+              </a:tr>
+              <a:tr h="418795">
+                <a:tc>
+                  <a:txBody>
+                    <a:bodyPr/>
+                    <a:lstStyle/>
+                    <a:p>
+                      <a:pPr algn="ctr"/>
+                      <a:r>
+                        <a:rPr sz="1500" b="0" i="0" u="none">
+                          <a:solidFill>
+                            <a:srgbClr val="000000"/>
+                          </a:solidFill>
+                          <a:latin typeface="Times New Roman"/>
+                        </a:rPr>
+                        <a:t>Software</a:t>
+                      </a:r>
+                    </a:p>
+                  </a:txBody>
+                  <a:tcPr anchor="ctr" marL="64008" marR="64008" marT="27432" marB="27432">
+                    <a:solidFill>
+                      <a:srgbClr val="FFFFFF"/>
+                    </a:solidFill>
+                  </a:tcPr>
+                </a:tc>
+                <a:tc>
+                  <a:txBody>
+                    <a:bodyPr/>
+                    <a:lstStyle/>
+                    <a:p>
+                      <a:pPr algn="l"/>
+                      <a:r>
+                        <a:rPr sz="1500" b="0" i="0" u="none">
+                          <a:solidFill>
+                            <a:srgbClr val="000000"/>
+                          </a:solidFill>
+                          <a:latin typeface="Times New Roman"/>
+                        </a:rPr>
+                        <a:t>ESP-IDF</a:t>
+                      </a:r>
+                    </a:p>
+                  </a:txBody>
+                  <a:tcPr anchor="ctr" marL="64008" marR="64008" marT="27432" marB="27432">
+                    <a:solidFill>
+                      <a:srgbClr val="FFFFFF"/>
+                    </a:solidFill>
+                  </a:tcPr>
+                </a:tc>
+                <a:tc>
+                  <a:txBody>
+                    <a:bodyPr/>
+                    <a:lstStyle/>
+                    <a:p>
+                      <a:pPr algn="l"/>
+                      <a:r>
+                        <a:rPr sz="1500" b="0" i="0" u="none">
+                          <a:solidFill>
+                            <a:srgbClr val="000000"/>
+                          </a:solidFill>
+                          <a:latin typeface="Times New Roman"/>
+                        </a:rPr>
+                        <a:t>The framework the firmware is built on</a:t>
+                      </a:r>
+                    </a:p>
+                  </a:txBody>
+                  <a:tcPr anchor="ctr" marL="64008" marR="64008" marT="27432" marB="27432">
+                    <a:solidFill>
+                      <a:srgbClr val="FFFFFF"/>
+                    </a:solidFill>
+                  </a:tcPr>
+                </a:tc>
+              </a:tr>
+              <a:tr h="418795">
+                <a:tc>
+                  <a:txBody>
+                    <a:bodyPr/>
+                    <a:lstStyle/>
+                    <a:p>
+                      <a:pPr algn="ctr"/>
+                      <a:r>
+                        <a:rPr sz="1500" b="0" i="0" u="none">
+                          <a:solidFill>
+                            <a:srgbClr val="000000"/>
+                          </a:solidFill>
+                          <a:latin typeface="Times New Roman"/>
+                        </a:rPr>
+                        <a:t>Software</a:t>
+                      </a:r>
+                    </a:p>
+                  </a:txBody>
+                  <a:tcPr anchor="ctr" marL="64008" marR="64008" marT="27432" marB="27432">
+                    <a:solidFill>
+                      <a:srgbClr val="EDEDED"/>
+                    </a:solidFill>
+                  </a:tcPr>
+                </a:tc>
+                <a:tc>
+                  <a:txBody>
+                    <a:bodyPr/>
+                    <a:lstStyle/>
+                    <a:p>
+                      <a:pPr algn="l"/>
+                      <a:r>
+                        <a:rPr sz="1500" b="0" i="0" u="none">
+                          <a:solidFill>
+                            <a:srgbClr val="000000"/>
+                          </a:solidFill>
+                          <a:latin typeface="Times New Roman"/>
+                        </a:rPr>
+                        <a:t>C++</a:t>
+                      </a:r>
+                    </a:p>
+                  </a:txBody>
+                  <a:tcPr anchor="ctr" marL="64008" marR="64008" marT="27432" marB="27432">
+                    <a:solidFill>
+                      <a:srgbClr val="EDEDED"/>
+                    </a:solidFill>
+                  </a:tcPr>
+                </a:tc>
+                <a:tc>
+                  <a:txBody>
+                    <a:bodyPr/>
+                    <a:lstStyle/>
+                    <a:p>
+                      <a:pPr algn="l"/>
+                      <a:r>
+                        <a:rPr sz="1500" b="0" i="0" u="none">
+                          <a:solidFill>
+                            <a:srgbClr val="000000"/>
+                          </a:solidFill>
+                          <a:latin typeface="Times New Roman"/>
+                        </a:rPr>
+                        <a:t>The language the firmware is written in</a:t>
+                      </a:r>
+                    </a:p>
+                  </a:txBody>
+                  <a:tcPr anchor="ctr" marL="64008" marR="64008" marT="27432" marB="27432">
+                    <a:solidFill>
+                      <a:srgbClr val="EDEDED"/>
+                    </a:solidFill>
+                  </a:tcPr>
+                </a:tc>
+              </a:tr>
+              <a:tr h="418795">
+                <a:tc>
+                  <a:txBody>
+                    <a:bodyPr/>
+                    <a:lstStyle/>
+                    <a:p>
+                      <a:pPr algn="ctr"/>
+                      <a:r>
+                        <a:rPr sz="1500" b="0" i="0" u="none">
+                          <a:solidFill>
+                            <a:srgbClr val="000000"/>
+                          </a:solidFill>
+                          <a:latin typeface="Times New Roman"/>
+                        </a:rPr>
+                        <a:t>Software</a:t>
+                      </a:r>
+                    </a:p>
+                  </a:txBody>
+                  <a:tcPr anchor="ctr" marL="64008" marR="64008" marT="27432" marB="27432">
+                    <a:solidFill>
+                      <a:srgbClr val="FFFFFF"/>
+                    </a:solidFill>
+                  </a:tcPr>
+                </a:tc>
+                <a:tc>
+                  <a:txBody>
+                    <a:bodyPr/>
+                    <a:lstStyle/>
+                    <a:p>
+                      <a:pPr algn="l"/>
+                      <a:r>
+                        <a:rPr sz="1500" b="0" i="0" u="none">
+                          <a:solidFill>
+                            <a:srgbClr val="000000"/>
+                          </a:solidFill>
+                          <a:latin typeface="Times New Roman"/>
+                        </a:rPr>
+                        <a:t>FreeRTOS</a:t>
+                      </a:r>
+                    </a:p>
+                  </a:txBody>
+                  <a:tcPr anchor="ctr" marL="64008" marR="64008" marT="27432" marB="27432">
+                    <a:solidFill>
+                      <a:srgbClr val="FFFFFF"/>
+                    </a:solidFill>
+                  </a:tcPr>
+                </a:tc>
+                <a:tc>
+                  <a:txBody>
+                    <a:bodyPr/>
+                    <a:lstStyle/>
+                    <a:p>
+                      <a:pPr algn="l"/>
+                      <a:r>
+                        <a:rPr sz="1500" b="0" i="0" u="none">
+                          <a:solidFill>
+                            <a:srgbClr val="000000"/>
+                          </a:solidFill>
+                          <a:latin typeface="Times New Roman"/>
+                        </a:rPr>
+                        <a:t>Running the sensor, safety and telemetry tasks</a:t>
+                      </a:r>
+                    </a:p>
+                  </a:txBody>
+                  <a:tcPr anchor="ctr" marL="64008" marR="64008" marT="27432" marB="27432">
+                    <a:solidFill>
+                      <a:srgbClr val="FFFFFF"/>
+                    </a:solidFill>
+                  </a:tcPr>
+                </a:tc>
+              </a:tr>
+              <a:tr h="418795">
+                <a:tc>
+                  <a:txBody>
+                    <a:bodyPr/>
+                    <a:lstStyle/>
+                    <a:p>
+                      <a:pPr algn="ctr"/>
+                      <a:r>
+                        <a:rPr sz="1500" b="0" i="0" u="none">
+                          <a:solidFill>
+                            <a:srgbClr val="000000"/>
+                          </a:solidFill>
+                          <a:latin typeface="Times New Roman"/>
+                        </a:rPr>
+                        <a:t>Software</a:t>
+                      </a:r>
+                    </a:p>
+                  </a:txBody>
+                  <a:tcPr anchor="ctr" marL="64008" marR="64008" marT="27432" marB="27432">
+                    <a:solidFill>
+                      <a:srgbClr val="EDEDED"/>
+                    </a:solidFill>
+                  </a:tcPr>
+                </a:tc>
+                <a:tc>
+                  <a:txBody>
+                    <a:bodyPr/>
+                    <a:lstStyle/>
+                    <a:p>
+                      <a:pPr algn="l"/>
+                      <a:r>
+                        <a:rPr sz="1500" b="0" i="0" u="none">
+                          <a:solidFill>
+                            <a:srgbClr val="000000"/>
+                          </a:solidFill>
+                          <a:latin typeface="Times New Roman"/>
+                        </a:rPr>
+                        <a:t>HTML, CSS, JavaScript</a:t>
+                      </a:r>
+                    </a:p>
+                  </a:txBody>
+                  <a:tcPr anchor="ctr" marL="64008" marR="64008" marT="27432" marB="27432">
+                    <a:solidFill>
+                      <a:srgbClr val="EDEDED"/>
+                    </a:solidFill>
+                  </a:tcPr>
+                </a:tc>
+                <a:tc>
+                  <a:txBody>
+                    <a:bodyPr/>
+                    <a:lstStyle/>
+                    <a:p>
+                      <a:pPr algn="l"/>
+                      <a:r>
+                        <a:rPr sz="1500" b="0" i="0" u="none">
+                          <a:solidFill>
+                            <a:srgbClr val="000000"/>
+                          </a:solidFill>
+                          <a:latin typeface="Times New Roman"/>
+                        </a:rPr>
+                        <a:t>The dashboard page in the browser</a:t>
+                      </a:r>
+                    </a:p>
+                  </a:txBody>
+                  <a:tcPr anchor="ctr" marL="64008" marR="64008" marT="27432" marB="27432">
+                    <a:solidFill>
+                      <a:srgbClr val="EDEDED"/>
+                    </a:solidFill>
+                  </a:tcPr>
+                </a:tc>
+              </a:tr>
+              <a:tr h="418797">
+                <a:tc>
+                  <a:txBody>
+                    <a:bodyPr/>
+                    <a:lstStyle/>
+                    <a:p>
+                      <a:pPr algn="ctr"/>
+                      <a:r>
+                        <a:rPr sz="1500" b="0" i="0" u="none">
+                          <a:solidFill>
+                            <a:srgbClr val="000000"/>
+                          </a:solidFill>
+                          <a:latin typeface="Times New Roman"/>
+                        </a:rPr>
+                        <a:t>Software</a:t>
+                      </a:r>
+                    </a:p>
+                  </a:txBody>
+                  <a:tcPr anchor="ctr" marL="64008" marR="64008" marT="27432" marB="27432">
+                    <a:solidFill>
+                      <a:srgbClr val="FFFFFF"/>
+                    </a:solidFill>
+                  </a:tcPr>
+                </a:tc>
+                <a:tc>
+                  <a:txBody>
+                    <a:bodyPr/>
+                    <a:lstStyle/>
+                    <a:p>
+                      <a:pPr algn="l"/>
+                      <a:r>
+                        <a:rPr sz="1500" b="0" i="0" u="none">
+                          <a:solidFill>
+                            <a:srgbClr val="000000"/>
+                          </a:solidFill>
+                          <a:latin typeface="Times New Roman"/>
+                        </a:rPr>
+                        <a:t>Git and GitHub</a:t>
+                      </a:r>
+                    </a:p>
+                  </a:txBody>
+                  <a:tcPr anchor="ctr" marL="64008" marR="64008" marT="27432" marB="27432">
+                    <a:solidFill>
+                      <a:srgbClr val="FFFFFF"/>
+                    </a:solidFill>
+                  </a:tcPr>
+                </a:tc>
+                <a:tc>
+                  <a:txBody>
+                    <a:bodyPr/>
+                    <a:lstStyle/>
+                    <a:p>
+                      <a:pPr algn="l"/>
+                      <a:r>
+                        <a:rPr sz="1500" b="0" i="0" u="none">
+                          <a:solidFill>
+                            <a:srgbClr val="000000"/>
+                          </a:solidFill>
+                          <a:latin typeface="Times New Roman"/>
+                        </a:rPr>
+                        <a:t>Keeping the code and the documents</a:t>
+                      </a:r>
+                    </a:p>
+                  </a:txBody>
+                  <a:tcPr anchor="ctr" marL="64008" marR="64008" marT="27432" marB="27432">
+                    <a:solidFill>
+                      <a:srgbClr val="FFFFFF"/>
+                    </a:solidFill>
+                  </a:tcPr>
+                </a:tc>
+              </a:tr>
+            </a:tbl>
+          </a:graphicData>
+        </a:graphic>
+      </p:graphicFrame>
+    </p:spTree>
+  </p:cSld>
+  <p:clrMapOvr>
+    <a:masterClrMapping/>
+  </p:clrMapOvr>
+</p:sld>
+</file>
+
+<file path=ppt/slides/slide7.xml><?xml version="1.0" encoding="utf-8"?>
+<p:sld xmlns:a="http://schemas.openxmlformats.org/drawingml/2006/main" xmlns:p="http://schemas.openxmlformats.org/presentationml/2006/main" xmlns:r="http://schemas.openxmlformats.org/officeDocument/2006/relationships">
+  <p:cSld>
+    <p:spTree>
+      <p:nvGrpSpPr>
+        <p:cNvPr id="1" name=""/>
+        <p:cNvGrpSpPr/>
+        <p:nvPr/>
+      </p:nvGrpSpPr>
+      <p:grpSpPr/>
+      <p:pic>
+        <p:nvPicPr>
+          <p:cNvPr id="2" name="Picture 1" descr="logo.png"/>
+          <p:cNvPicPr>
+            <a:picLocks noChangeAspect="1"/>
+          </p:cNvPicPr>
+          <p:nvPr/>
+        </p:nvPicPr>
+        <p:blipFill>
+          <a:blip r:embed="rId2"/>
+          <a:stretch>
+            <a:fillRect/>
+          </a:stretch>
+        </p:blipFill>
+        <p:spPr>
+          <a:xfrm>
+            <a:off x="286207" y="109728"/>
+            <a:ext cx="646480" cy="950976"/>
+          </a:xfrm>
+          <a:prstGeom prst="rect">
+            <a:avLst/>
+          </a:prstGeom>
+        </p:spPr>
+      </p:pic>
+      <p:sp>
+        <p:nvSpPr>
+          <p:cNvPr id="3" name="TextBox 2"/>
+          <p:cNvSpPr txBox="1"/>
+          <p:nvPr/>
+        </p:nvSpPr>
+        <p:spPr>
+          <a:xfrm>
+            <a:off x="1188720" y="384048"/>
+            <a:ext cx="9814255" cy="548640"/>
+          </a:xfrm>
+          <a:prstGeom prst="rect">
+            <a:avLst/>
+          </a:prstGeom>
+          <a:noFill/>
+        </p:spPr>
+        <p:txBody>
+          <a:bodyPr wrap="square" lIns="0" rIns="0" tIns="0" bIns="0">
+            <a:noAutofit/>
+          </a:bodyPr>
+          <a:lstStyle/>
+          <a:p>
+            <a:pPr algn="ctr"/>
+            <a:r>
+              <a:rPr sz="2400" b="1" i="0" u="sng">
+                <a:solidFill>
+                  <a:srgbClr val="000000"/>
+                </a:solidFill>
+                <a:latin typeface="Times New Roman"/>
+              </a:rPr>
+              <a:t>Literature Survey</a:t>
+            </a:r>
+          </a:p>
+        </p:txBody>
+      </p:sp>
+      <p:sp>
+        <p:nvSpPr>
+          <p:cNvPr id="4" name="TextBox 3"/>
+          <p:cNvSpPr txBox="1"/>
+          <p:nvPr/>
+        </p:nvSpPr>
+        <p:spPr>
+          <a:xfrm>
+            <a:off x="929944" y="6355080"/>
+            <a:ext cx="2286000" cy="292608"/>
+          </a:xfrm>
+          <a:prstGeom prst="rect">
+            <a:avLst/>
+          </a:prstGeom>
+          <a:noFill/>
+        </p:spPr>
+        <p:txBody>
+          <a:bodyPr wrap="square" lIns="0" rIns="0" tIns="0" bIns="0">
+            <a:noAutofit/>
+          </a:bodyPr>
+          <a:lstStyle/>
+          <a:p>
+            <a:r>
+              <a:rPr sz="1200" b="0" i="0" u="none">
+                <a:solidFill>
+                  <a:srgbClr val="898989"/>
+                </a:solidFill>
+                <a:latin typeface="Calibri"/>
+              </a:rPr>
+              <a:t>22-07-2026</a:t>
+            </a:r>
+          </a:p>
+        </p:txBody>
+      </p:sp>
+      <p:sp>
+        <p:nvSpPr>
+          <p:cNvPr id="5" name="TextBox 4"/>
+          <p:cNvSpPr txBox="1"/>
+          <p:nvPr/>
+        </p:nvSpPr>
+        <p:spPr>
+          <a:xfrm>
+            <a:off x="3931920" y="6355080"/>
+            <a:ext cx="4297680" cy="292608"/>
+          </a:xfrm>
+          <a:prstGeom prst="rect">
+            <a:avLst/>
+          </a:prstGeom>
+          <a:noFill/>
+        </p:spPr>
+        <p:txBody>
+          <a:bodyPr wrap="square" lIns="0" rIns="0" tIns="0" bIns="0">
+            <a:noAutofit/>
+          </a:bodyPr>
+          <a:lstStyle/>
+          <a:p>
+            <a:pPr algn="ctr"/>
+            <a:r>
+              <a:rPr sz="1200" b="0" i="0" u="none">
+                <a:solidFill>
+                  <a:srgbClr val="898989"/>
+                </a:solidFill>
+                <a:latin typeface="Calibri"/>
+              </a:rPr>
+              <a:t>Zeroth Review-2026-27</a:t>
+            </a:r>
+          </a:p>
+        </p:txBody>
+      </p:sp>
+      <p:sp>
+        <p:nvSpPr>
+          <p:cNvPr id="6" name="TextBox 5"/>
+          <p:cNvSpPr txBox="1"/>
+          <p:nvPr/>
+        </p:nvSpPr>
+        <p:spPr>
+          <a:xfrm>
+            <a:off x="10058400" y="6355080"/>
+            <a:ext cx="1204264" cy="292608"/>
+          </a:xfrm>
+          <a:prstGeom prst="rect">
+            <a:avLst/>
+          </a:prstGeom>
+          <a:noFill/>
+        </p:spPr>
+        <p:txBody>
+          <a:bodyPr wrap="square" lIns="0" rIns="0" tIns="0" bIns="0">
+            <a:noAutofit/>
+          </a:bodyPr>
+          <a:lstStyle/>
+          <a:p>
+            <a:pPr algn="r"/>
+            <a:r>
+              <a:rPr sz="1200" b="0" i="0" u="none">
+                <a:solidFill>
+                  <a:srgbClr val="898989"/>
+                </a:solidFill>
+                <a:latin typeface="Calibri"/>
+              </a:rPr>
+              <a:t>7</a:t>
             </a:r>
           </a:p>
         </p:txBody>
@@ -6368,355 +7451,6 @@
 </p:sld>
 </file>
 
-<file path=ppt/slides/slide7.xml><?xml version="1.0" encoding="utf-8"?>
-<p:sld xmlns:a="http://schemas.openxmlformats.org/drawingml/2006/main" xmlns:p="http://schemas.openxmlformats.org/presentationml/2006/main" xmlns:r="http://schemas.openxmlformats.org/officeDocument/2006/relationships">
-  <p:cSld>
-    <p:spTree>
-      <p:nvGrpSpPr>
-        <p:cNvPr id="1" name=""/>
-        <p:cNvGrpSpPr/>
-        <p:nvPr/>
-      </p:nvGrpSpPr>
-      <p:grpSpPr/>
-      <p:pic>
-        <p:nvPicPr>
-          <p:cNvPr id="2" name="Picture 1" descr="logo.png"/>
-          <p:cNvPicPr>
-            <a:picLocks noChangeAspect="1"/>
-          </p:cNvPicPr>
-          <p:nvPr/>
-        </p:nvPicPr>
-        <p:blipFill>
-          <a:blip r:embed="rId2"/>
-          <a:stretch>
-            <a:fillRect/>
-          </a:stretch>
-        </p:blipFill>
-        <p:spPr>
-          <a:xfrm>
-            <a:off x="286207" y="109728"/>
-            <a:ext cx="646480" cy="950976"/>
-          </a:xfrm>
-          <a:prstGeom prst="rect">
-            <a:avLst/>
-          </a:prstGeom>
-        </p:spPr>
-      </p:pic>
-      <p:sp>
-        <p:nvSpPr>
-          <p:cNvPr id="3" name="TextBox 2"/>
-          <p:cNvSpPr txBox="1"/>
-          <p:nvPr/>
-        </p:nvSpPr>
-        <p:spPr>
-          <a:xfrm>
-            <a:off x="1188720" y="384048"/>
-            <a:ext cx="9814255" cy="548640"/>
-          </a:xfrm>
-          <a:prstGeom prst="rect">
-            <a:avLst/>
-          </a:prstGeom>
-          <a:noFill/>
-        </p:spPr>
-        <p:txBody>
-          <a:bodyPr wrap="square" lIns="0" rIns="0" tIns="0" bIns="0">
-            <a:noAutofit/>
-          </a:bodyPr>
-          <a:lstStyle/>
-          <a:p>
-            <a:pPr algn="ctr"/>
-            <a:r>
-              <a:rPr sz="2400" b="1" i="0" u="sng">
-                <a:solidFill>
-                  <a:srgbClr val="000000"/>
-                </a:solidFill>
-                <a:latin typeface="Times New Roman"/>
-              </a:rPr>
-              <a:t>References</a:t>
-            </a:r>
-          </a:p>
-        </p:txBody>
-      </p:sp>
-      <p:sp>
-        <p:nvSpPr>
-          <p:cNvPr id="4" name="TextBox 3"/>
-          <p:cNvSpPr txBox="1"/>
-          <p:nvPr/>
-        </p:nvSpPr>
-        <p:spPr>
-          <a:xfrm>
-            <a:off x="929944" y="6355080"/>
-            <a:ext cx="2286000" cy="292608"/>
-          </a:xfrm>
-          <a:prstGeom prst="rect">
-            <a:avLst/>
-          </a:prstGeom>
-          <a:noFill/>
-        </p:spPr>
-        <p:txBody>
-          <a:bodyPr wrap="square" lIns="0" rIns="0" tIns="0" bIns="0">
-            <a:noAutofit/>
-          </a:bodyPr>
-          <a:lstStyle/>
-          <a:p>
-            <a:r>
-              <a:rPr sz="1200" b="0" i="0" u="none">
-                <a:solidFill>
-                  <a:srgbClr val="898989"/>
-                </a:solidFill>
-                <a:latin typeface="Calibri"/>
-              </a:rPr>
-              <a:t>22-07-2026</a:t>
-            </a:r>
-          </a:p>
-        </p:txBody>
-      </p:sp>
-      <p:sp>
-        <p:nvSpPr>
-          <p:cNvPr id="5" name="TextBox 4"/>
-          <p:cNvSpPr txBox="1"/>
-          <p:nvPr/>
-        </p:nvSpPr>
-        <p:spPr>
-          <a:xfrm>
-            <a:off x="3931920" y="6355080"/>
-            <a:ext cx="4297680" cy="292608"/>
-          </a:xfrm>
-          <a:prstGeom prst="rect">
-            <a:avLst/>
-          </a:prstGeom>
-          <a:noFill/>
-        </p:spPr>
-        <p:txBody>
-          <a:bodyPr wrap="square" lIns="0" rIns="0" tIns="0" bIns="0">
-            <a:noAutofit/>
-          </a:bodyPr>
-          <a:lstStyle/>
-          <a:p>
-            <a:pPr algn="ctr"/>
-            <a:r>
-              <a:rPr sz="1200" b="0" i="0" u="none">
-                <a:solidFill>
-                  <a:srgbClr val="898989"/>
-                </a:solidFill>
-                <a:latin typeface="Calibri"/>
-              </a:rPr>
-              <a:t>Zeroth Review-2026-27</a:t>
-            </a:r>
-          </a:p>
-        </p:txBody>
-      </p:sp>
-      <p:sp>
-        <p:nvSpPr>
-          <p:cNvPr id="6" name="TextBox 5"/>
-          <p:cNvSpPr txBox="1"/>
-          <p:nvPr/>
-        </p:nvSpPr>
-        <p:spPr>
-          <a:xfrm>
-            <a:off x="10058400" y="6355080"/>
-            <a:ext cx="1204264" cy="292608"/>
-          </a:xfrm>
-          <a:prstGeom prst="rect">
-            <a:avLst/>
-          </a:prstGeom>
-          <a:noFill/>
-        </p:spPr>
-        <p:txBody>
-          <a:bodyPr wrap="square" lIns="0" rIns="0" tIns="0" bIns="0">
-            <a:noAutofit/>
-          </a:bodyPr>
-          <a:lstStyle/>
-          <a:p>
-            <a:pPr algn="r"/>
-            <a:r>
-              <a:rPr sz="1200" b="0" i="0" u="none">
-                <a:solidFill>
-                  <a:srgbClr val="898989"/>
-                </a:solidFill>
-                <a:latin typeface="Calibri"/>
-              </a:rPr>
-              <a:t>7</a:t>
-            </a:r>
-          </a:p>
-        </p:txBody>
-      </p:sp>
-      <p:sp>
-        <p:nvSpPr>
-          <p:cNvPr id="7" name="TextBox 6"/>
-          <p:cNvSpPr txBox="1"/>
-          <p:nvPr/>
-        </p:nvSpPr>
-        <p:spPr>
-          <a:xfrm>
-            <a:off x="1168603" y="1389888"/>
-            <a:ext cx="10195560" cy="4754879"/>
-          </a:xfrm>
-          <a:prstGeom prst="rect">
-            <a:avLst/>
-          </a:prstGeom>
-          <a:noFill/>
-        </p:spPr>
-        <p:txBody>
-          <a:bodyPr wrap="square" lIns="0" rIns="0" tIns="0" bIns="0">
-            <a:noAutofit/>
-          </a:bodyPr>
-          <a:lstStyle/>
-          <a:p>
-            <a:pPr marL="384048" indent="-384048">
-              <a:lnSpc>
-                <a:spcPct val="110000"/>
-              </a:lnSpc>
-              <a:spcAft>
-                <a:spcPts val="2000"/>
-              </a:spcAft>
-              <a:buNone/>
-            </a:pPr>
-            <a:r>
-              <a:rPr sz="1400" b="0" i="0" u="none">
-                <a:solidFill>
-                  <a:srgbClr val="000000"/>
-                </a:solidFill>
-                <a:latin typeface="Times New Roman"/>
-              </a:rPr>
-              <a:t>[1]  </a:t>
-            </a:r>
-            <a:r>
-              <a:rPr sz="1400" b="0" i="0" u="none">
-                <a:solidFill>
-                  <a:srgbClr val="000000"/>
-                </a:solidFill>
-                <a:latin typeface="Times New Roman"/>
-              </a:rPr>
-              <a:t>X. Feng, M. Ouyang, X. Liu, L. Lu, Y. Xia and X. He, “Thermal runaway mechanism of lithium ion battery for electric vehicles: A review,” Energy Storage Materials, vol. 10, pp. 246–267, 2018.</a:t>
-            </a:r>
-          </a:p>
-          <a:p>
-            <a:pPr marL="384048" indent="-384048">
-              <a:lnSpc>
-                <a:spcPct val="110000"/>
-              </a:lnSpc>
-              <a:spcAft>
-                <a:spcPts val="2000"/>
-              </a:spcAft>
-              <a:buNone/>
-            </a:pPr>
-            <a:r>
-              <a:rPr sz="1400" b="0" i="0" u="none">
-                <a:solidFill>
-                  <a:srgbClr val="000000"/>
-                </a:solidFill>
-                <a:latin typeface="Times New Roman"/>
-              </a:rPr>
-              <a:t>[2]  </a:t>
-            </a:r>
-            <a:r>
-              <a:rPr sz="1400" b="0" i="0" u="none">
-                <a:solidFill>
-                  <a:srgbClr val="000000"/>
-                </a:solidFill>
-                <a:latin typeface="Times New Roman"/>
-              </a:rPr>
-              <a:t>X. Zhang, S. Chen, J. Zhu et al., “A critical review of thermal runaway prediction and early-warning methods for lithium-ion batteries,” Energy Material Advances, vol. 4, art. 0008, 2023.</a:t>
-            </a:r>
-          </a:p>
-          <a:p>
-            <a:pPr marL="384048" indent="-384048">
-              <a:lnSpc>
-                <a:spcPct val="110000"/>
-              </a:lnSpc>
-              <a:spcAft>
-                <a:spcPts val="2000"/>
-              </a:spcAft>
-              <a:buNone/>
-            </a:pPr>
-            <a:r>
-              <a:rPr sz="1400" b="0" i="0" u="none">
-                <a:solidFill>
-                  <a:srgbClr val="000000"/>
-                </a:solidFill>
-                <a:latin typeface="Times New Roman"/>
-              </a:rPr>
-              <a:t>[3]  </a:t>
-            </a:r>
-            <a:r>
-              <a:rPr sz="1400" b="0" i="0" u="none">
-                <a:solidFill>
-                  <a:srgbClr val="000000"/>
-                </a:solidFill>
-                <a:latin typeface="Times New Roman"/>
-              </a:rPr>
-              <a:t>Q. Chen, Y. He, N. Fang and G. Yu, “A combined data-driven and model-based algorithm for accurate battery thermal runaway warning,” Sensors, vol. 24, no. 15, art. 4964, 2024.</a:t>
-            </a:r>
-          </a:p>
-          <a:p>
-            <a:pPr marL="384048" indent="-384048">
-              <a:lnSpc>
-                <a:spcPct val="110000"/>
-              </a:lnSpc>
-              <a:spcAft>
-                <a:spcPts val="2000"/>
-              </a:spcAft>
-              <a:buNone/>
-            </a:pPr>
-            <a:r>
-              <a:rPr sz="1400" b="0" i="0" u="none">
-                <a:solidFill>
-                  <a:srgbClr val="000000"/>
-                </a:solidFill>
-                <a:latin typeface="Times New Roman"/>
-              </a:rPr>
-              <a:t>[4]  </a:t>
-            </a:r>
-            <a:r>
-              <a:rPr sz="1400" b="0" i="0" u="none">
-                <a:solidFill>
-                  <a:srgbClr val="000000"/>
-                </a:solidFill>
-                <a:latin typeface="Times New Roman"/>
-              </a:rPr>
-              <a:t>A. K. M. A. Habib, M. K. Hasan, G. F. Issa, D. Singh, S. Islam and T. M. Ghazal, “Lithium-ion battery management system for electric vehicles: Constraints, challenges and recommendations,” Batteries, vol. 9, no. 3, art. 152, 2023.</a:t>
-            </a:r>
-          </a:p>
-          <a:p>
-            <a:pPr marL="384048" indent="-384048">
-              <a:lnSpc>
-                <a:spcPct val="110000"/>
-              </a:lnSpc>
-              <a:spcAft>
-                <a:spcPts val="2000"/>
-              </a:spcAft>
-              <a:buNone/>
-            </a:pPr>
-            <a:r>
-              <a:rPr sz="1400" b="0" i="0" u="none">
-                <a:solidFill>
-                  <a:srgbClr val="000000"/>
-                </a:solidFill>
-                <a:latin typeface="Times New Roman"/>
-              </a:rPr>
-              <a:t>[5]  </a:t>
-            </a:r>
-            <a:r>
-              <a:rPr sz="1400" b="0" i="0" u="none">
-                <a:solidFill>
-                  <a:srgbClr val="000000"/>
-                </a:solidFill>
-                <a:latin typeface="Times New Roman"/>
-              </a:rPr>
-              <a:t>IS 16046 (Part 2) : 2018 / IEC 62133-2 : 2017, Secondary cells and batteries containing alkaline or other non-acid electrolytes — Part 2: Lithium systems.</a:t>
-            </a:r>
-          </a:p>
-        </p:txBody>
-      </p:sp>
-    </p:spTree>
-  </p:cSld>
-  <p:clrMapOvr>
-    <a:masterClrMapping/>
-  </p:clrMapOvr>
-</p:sld>
-</file>
-
 <file path=ppt/slides/slide8.xml><?xml version="1.0" encoding="utf-8"?>
 <p:sld xmlns:a="http://schemas.openxmlformats.org/drawingml/2006/main" xmlns:p="http://schemas.openxmlformats.org/presentationml/2006/main" xmlns:r="http://schemas.openxmlformats.org/officeDocument/2006/relationships">
   <p:cSld>
@@ -6759,8 +7493,8 @@
         </p:nvSpPr>
         <p:spPr>
           <a:xfrm>
-            <a:off x="929944" y="6355080"/>
-            <a:ext cx="2286000" cy="292608"/>
+            <a:off x="1188720" y="384048"/>
+            <a:ext cx="9814255" cy="548640"/>
           </a:xfrm>
           <a:prstGeom prst="rect">
             <a:avLst/>
@@ -6773,14 +7507,15 @@
           </a:bodyPr>
           <a:lstStyle/>
           <a:p>
-            <a:r>
-              <a:rPr sz="1200" b="0" i="0" u="none">
-                <a:solidFill>
-                  <a:srgbClr val="898989"/>
-                </a:solidFill>
-                <a:latin typeface="Calibri"/>
-              </a:rPr>
-              <a:t>22-07-2026</a:t>
+            <a:pPr algn="ctr"/>
+            <a:r>
+              <a:rPr sz="2400" b="1" i="0" u="sng">
+                <a:solidFill>
+                  <a:srgbClr val="000000"/>
+                </a:solidFill>
+                <a:latin typeface="Times New Roman"/>
+              </a:rPr>
+              <a:t>References</a:t>
             </a:r>
           </a:p>
         </p:txBody>
@@ -6793,8 +7528,8 @@
         </p:nvSpPr>
         <p:spPr>
           <a:xfrm>
-            <a:off x="3931920" y="6355080"/>
-            <a:ext cx="4297680" cy="292608"/>
+            <a:off x="929944" y="6355080"/>
+            <a:ext cx="2286000" cy="292608"/>
           </a:xfrm>
           <a:prstGeom prst="rect">
             <a:avLst/>
@@ -6807,7 +7542,6 @@
           </a:bodyPr>
           <a:lstStyle/>
           <a:p>
-            <a:pPr algn="ctr"/>
             <a:r>
               <a:rPr sz="1200" b="0" i="0" u="none">
                 <a:solidFill>
@@ -6815,7 +7549,7 @@
                 </a:solidFill>
                 <a:latin typeface="Calibri"/>
               </a:rPr>
-              <a:t>Zeroth Review-2026-27</a:t>
+              <a:t>22-07-2026</a:t>
             </a:r>
           </a:p>
         </p:txBody>
@@ -6828,8 +7562,8 @@
         </p:nvSpPr>
         <p:spPr>
           <a:xfrm>
-            <a:off x="10058400" y="6355080"/>
-            <a:ext cx="1204264" cy="292608"/>
+            <a:off x="3931920" y="6355080"/>
+            <a:ext cx="4297680" cy="292608"/>
           </a:xfrm>
           <a:prstGeom prst="rect">
             <a:avLst/>
@@ -6842,6 +7576,41 @@
           </a:bodyPr>
           <a:lstStyle/>
           <a:p>
+            <a:pPr algn="ctr"/>
+            <a:r>
+              <a:rPr sz="1200" b="0" i="0" u="none">
+                <a:solidFill>
+                  <a:srgbClr val="898989"/>
+                </a:solidFill>
+                <a:latin typeface="Calibri"/>
+              </a:rPr>
+              <a:t>Zeroth Review-2026-27</a:t>
+            </a:r>
+          </a:p>
+        </p:txBody>
+      </p:sp>
+      <p:sp>
+        <p:nvSpPr>
+          <p:cNvPr id="6" name="TextBox 5"/>
+          <p:cNvSpPr txBox="1"/>
+          <p:nvPr/>
+        </p:nvSpPr>
+        <p:spPr>
+          <a:xfrm>
+            <a:off x="10058400" y="6355080"/>
+            <a:ext cx="1204264" cy="292608"/>
+          </a:xfrm>
+          <a:prstGeom prst="rect">
+            <a:avLst/>
+          </a:prstGeom>
+          <a:noFill/>
+        </p:spPr>
+        <p:txBody>
+          <a:bodyPr wrap="square" lIns="0" rIns="0" tIns="0" bIns="0">
+            <a:noAutofit/>
+          </a:bodyPr>
+          <a:lstStyle/>
+          <a:p>
             <a:pPr algn="r"/>
             <a:r>
               <a:rPr sz="1200" b="0" i="0" u="none">
@@ -6851,6 +7620,320 @@
                 <a:latin typeface="Calibri"/>
               </a:rPr>
               <a:t>8</a:t>
+            </a:r>
+          </a:p>
+        </p:txBody>
+      </p:sp>
+      <p:sp>
+        <p:nvSpPr>
+          <p:cNvPr id="7" name="TextBox 6"/>
+          <p:cNvSpPr txBox="1"/>
+          <p:nvPr/>
+        </p:nvSpPr>
+        <p:spPr>
+          <a:xfrm>
+            <a:off x="1168603" y="1389888"/>
+            <a:ext cx="10195560" cy="4754879"/>
+          </a:xfrm>
+          <a:prstGeom prst="rect">
+            <a:avLst/>
+          </a:prstGeom>
+          <a:noFill/>
+        </p:spPr>
+        <p:txBody>
+          <a:bodyPr wrap="square" lIns="0" rIns="0" tIns="0" bIns="0">
+            <a:noAutofit/>
+          </a:bodyPr>
+          <a:lstStyle/>
+          <a:p>
+            <a:pPr marL="384048" indent="-384048">
+              <a:lnSpc>
+                <a:spcPct val="110000"/>
+              </a:lnSpc>
+              <a:spcAft>
+                <a:spcPts val="2000"/>
+              </a:spcAft>
+              <a:buNone/>
+            </a:pPr>
+            <a:r>
+              <a:rPr sz="1400" b="0" i="0" u="none">
+                <a:solidFill>
+                  <a:srgbClr val="000000"/>
+                </a:solidFill>
+                <a:latin typeface="Times New Roman"/>
+              </a:rPr>
+              <a:t>[1]  </a:t>
+            </a:r>
+            <a:r>
+              <a:rPr sz="1400" b="0" i="0" u="none">
+                <a:solidFill>
+                  <a:srgbClr val="000000"/>
+                </a:solidFill>
+                <a:latin typeface="Times New Roman"/>
+              </a:rPr>
+              <a:t>X. Feng, M. Ouyang, X. Liu, L. Lu, Y. Xia and X. He, “Thermal runaway mechanism of lithium ion battery for electric vehicles: A review,” Energy Storage Materials, vol. 10, pp. 246–267, 2018.</a:t>
+            </a:r>
+          </a:p>
+          <a:p>
+            <a:pPr marL="384048" indent="-384048">
+              <a:lnSpc>
+                <a:spcPct val="110000"/>
+              </a:lnSpc>
+              <a:spcAft>
+                <a:spcPts val="2000"/>
+              </a:spcAft>
+              <a:buNone/>
+            </a:pPr>
+            <a:r>
+              <a:rPr sz="1400" b="0" i="0" u="none">
+                <a:solidFill>
+                  <a:srgbClr val="000000"/>
+                </a:solidFill>
+                <a:latin typeface="Times New Roman"/>
+              </a:rPr>
+              <a:t>[2]  </a:t>
+            </a:r>
+            <a:r>
+              <a:rPr sz="1400" b="0" i="0" u="none">
+                <a:solidFill>
+                  <a:srgbClr val="000000"/>
+                </a:solidFill>
+                <a:latin typeface="Times New Roman"/>
+              </a:rPr>
+              <a:t>X. Zhang, S. Chen, J. Zhu et al., “A critical review of thermal runaway prediction and early-warning methods for lithium-ion batteries,” Energy Material Advances, vol. 4, art. 0008, 2023.</a:t>
+            </a:r>
+          </a:p>
+          <a:p>
+            <a:pPr marL="384048" indent="-384048">
+              <a:lnSpc>
+                <a:spcPct val="110000"/>
+              </a:lnSpc>
+              <a:spcAft>
+                <a:spcPts val="2000"/>
+              </a:spcAft>
+              <a:buNone/>
+            </a:pPr>
+            <a:r>
+              <a:rPr sz="1400" b="0" i="0" u="none">
+                <a:solidFill>
+                  <a:srgbClr val="000000"/>
+                </a:solidFill>
+                <a:latin typeface="Times New Roman"/>
+              </a:rPr>
+              <a:t>[3]  </a:t>
+            </a:r>
+            <a:r>
+              <a:rPr sz="1400" b="0" i="0" u="none">
+                <a:solidFill>
+                  <a:srgbClr val="000000"/>
+                </a:solidFill>
+                <a:latin typeface="Times New Roman"/>
+              </a:rPr>
+              <a:t>Q. Chen, Y. He, N. Fang and G. Yu, “A combined data-driven and model-based algorithm for accurate battery thermal runaway warning,” Sensors, vol. 24, no. 15, art. 4964, 2024.</a:t>
+            </a:r>
+          </a:p>
+          <a:p>
+            <a:pPr marL="384048" indent="-384048">
+              <a:lnSpc>
+                <a:spcPct val="110000"/>
+              </a:lnSpc>
+              <a:spcAft>
+                <a:spcPts val="2000"/>
+              </a:spcAft>
+              <a:buNone/>
+            </a:pPr>
+            <a:r>
+              <a:rPr sz="1400" b="0" i="0" u="none">
+                <a:solidFill>
+                  <a:srgbClr val="000000"/>
+                </a:solidFill>
+                <a:latin typeface="Times New Roman"/>
+              </a:rPr>
+              <a:t>[4]  </a:t>
+            </a:r>
+            <a:r>
+              <a:rPr sz="1400" b="0" i="0" u="none">
+                <a:solidFill>
+                  <a:srgbClr val="000000"/>
+                </a:solidFill>
+                <a:latin typeface="Times New Roman"/>
+              </a:rPr>
+              <a:t>A. K. M. A. Habib, M. K. Hasan, G. F. Issa, D. Singh, S. Islam and T. M. Ghazal, “Lithium-ion battery management system for electric vehicles: Constraints, challenges and recommendations,” Batteries, vol. 9, no. 3, art. 152, 2023.</a:t>
+            </a:r>
+          </a:p>
+          <a:p>
+            <a:pPr marL="384048" indent="-384048">
+              <a:lnSpc>
+                <a:spcPct val="110000"/>
+              </a:lnSpc>
+              <a:spcAft>
+                <a:spcPts val="2000"/>
+              </a:spcAft>
+              <a:buNone/>
+            </a:pPr>
+            <a:r>
+              <a:rPr sz="1400" b="0" i="0" u="none">
+                <a:solidFill>
+                  <a:srgbClr val="000000"/>
+                </a:solidFill>
+                <a:latin typeface="Times New Roman"/>
+              </a:rPr>
+              <a:t>[5]  </a:t>
+            </a:r>
+            <a:r>
+              <a:rPr sz="1400" b="0" i="0" u="none">
+                <a:solidFill>
+                  <a:srgbClr val="000000"/>
+                </a:solidFill>
+                <a:latin typeface="Times New Roman"/>
+              </a:rPr>
+              <a:t>IS 16046 (Part 2) : 2018 / IEC 62133-2 : 2017, Secondary cells and batteries containing alkaline or other non-acid electrolytes — Part 2: Lithium systems.</a:t>
+            </a:r>
+          </a:p>
+        </p:txBody>
+      </p:sp>
+    </p:spTree>
+  </p:cSld>
+  <p:clrMapOvr>
+    <a:masterClrMapping/>
+  </p:clrMapOvr>
+</p:sld>
+</file>
+
+<file path=ppt/slides/slide9.xml><?xml version="1.0" encoding="utf-8"?>
+<p:sld xmlns:a="http://schemas.openxmlformats.org/drawingml/2006/main" xmlns:p="http://schemas.openxmlformats.org/presentationml/2006/main" xmlns:r="http://schemas.openxmlformats.org/officeDocument/2006/relationships">
+  <p:cSld>
+    <p:spTree>
+      <p:nvGrpSpPr>
+        <p:cNvPr id="1" name=""/>
+        <p:cNvGrpSpPr/>
+        <p:nvPr/>
+      </p:nvGrpSpPr>
+      <p:grpSpPr/>
+      <p:pic>
+        <p:nvPicPr>
+          <p:cNvPr id="2" name="Picture 1" descr="logo.png"/>
+          <p:cNvPicPr>
+            <a:picLocks noChangeAspect="1"/>
+          </p:cNvPicPr>
+          <p:nvPr/>
+        </p:nvPicPr>
+        <p:blipFill>
+          <a:blip r:embed="rId2"/>
+          <a:stretch>
+            <a:fillRect/>
+          </a:stretch>
+        </p:blipFill>
+        <p:spPr>
+          <a:xfrm>
+            <a:off x="286207" y="109728"/>
+            <a:ext cx="646480" cy="950976"/>
+          </a:xfrm>
+          <a:prstGeom prst="rect">
+            <a:avLst/>
+          </a:prstGeom>
+        </p:spPr>
+      </p:pic>
+      <p:sp>
+        <p:nvSpPr>
+          <p:cNvPr id="3" name="TextBox 2"/>
+          <p:cNvSpPr txBox="1"/>
+          <p:nvPr/>
+        </p:nvSpPr>
+        <p:spPr>
+          <a:xfrm>
+            <a:off x="929944" y="6355080"/>
+            <a:ext cx="2286000" cy="292608"/>
+          </a:xfrm>
+          <a:prstGeom prst="rect">
+            <a:avLst/>
+          </a:prstGeom>
+          <a:noFill/>
+        </p:spPr>
+        <p:txBody>
+          <a:bodyPr wrap="square" lIns="0" rIns="0" tIns="0" bIns="0">
+            <a:noAutofit/>
+          </a:bodyPr>
+          <a:lstStyle/>
+          <a:p>
+            <a:r>
+              <a:rPr sz="1200" b="0" i="0" u="none">
+                <a:solidFill>
+                  <a:srgbClr val="898989"/>
+                </a:solidFill>
+                <a:latin typeface="Calibri"/>
+              </a:rPr>
+              <a:t>22-07-2026</a:t>
+            </a:r>
+          </a:p>
+        </p:txBody>
+      </p:sp>
+      <p:sp>
+        <p:nvSpPr>
+          <p:cNvPr id="4" name="TextBox 3"/>
+          <p:cNvSpPr txBox="1"/>
+          <p:nvPr/>
+        </p:nvSpPr>
+        <p:spPr>
+          <a:xfrm>
+            <a:off x="3931920" y="6355080"/>
+            <a:ext cx="4297680" cy="292608"/>
+          </a:xfrm>
+          <a:prstGeom prst="rect">
+            <a:avLst/>
+          </a:prstGeom>
+          <a:noFill/>
+        </p:spPr>
+        <p:txBody>
+          <a:bodyPr wrap="square" lIns="0" rIns="0" tIns="0" bIns="0">
+            <a:noAutofit/>
+          </a:bodyPr>
+          <a:lstStyle/>
+          <a:p>
+            <a:pPr algn="ctr"/>
+            <a:r>
+              <a:rPr sz="1200" b="0" i="0" u="none">
+                <a:solidFill>
+                  <a:srgbClr val="898989"/>
+                </a:solidFill>
+                <a:latin typeface="Calibri"/>
+              </a:rPr>
+              <a:t>Zeroth Review-2026-27</a:t>
+            </a:r>
+          </a:p>
+        </p:txBody>
+      </p:sp>
+      <p:sp>
+        <p:nvSpPr>
+          <p:cNvPr id="5" name="TextBox 4"/>
+          <p:cNvSpPr txBox="1"/>
+          <p:nvPr/>
+        </p:nvSpPr>
+        <p:spPr>
+          <a:xfrm>
+            <a:off x="10058400" y="6355080"/>
+            <a:ext cx="1204264" cy="292608"/>
+          </a:xfrm>
+          <a:prstGeom prst="rect">
+            <a:avLst/>
+          </a:prstGeom>
+          <a:noFill/>
+        </p:spPr>
+        <p:txBody>
+          <a:bodyPr wrap="square" lIns="0" rIns="0" tIns="0" bIns="0">
+            <a:noAutofit/>
+          </a:bodyPr>
+          <a:lstStyle/>
+          <a:p>
+            <a:pPr algn="r"/>
+            <a:r>
+              <a:rPr sz="1200" b="0" i="0" u="none">
+                <a:solidFill>
+                  <a:srgbClr val="898989"/>
+                </a:solidFill>
+                <a:latin typeface="Calibri"/>
+              </a:rPr>
+              <a:t>9</a:t>
             </a:r>
           </a:p>
         </p:txBody>

--- a/docs/reviews/zeroth-review/Predictive_BMS_Zeroth_Review.pptx
+++ b/docs/reviews/zeroth-review/Predictive_BMS_Zeroth_Review.pptx
@@ -14,6 +14,7 @@
     <p:sldId id="262" r:id="rId14"/>
     <p:sldId id="263" r:id="rId15"/>
     <p:sldId id="264" r:id="rId16"/>
+    <p:sldId id="265" r:id="rId17"/>
   </p:sldIdLst>
   <p:sldSz cx="12191695" cy="6858000" type="screen4x3"/>
   <p:notesSz cx="6858000" cy="9144000"/>
@@ -555,6 +556,81 @@
 </p:notes>
 </file>
 
+<file path=ppt/notesSlides/notesSlide10.xml><?xml version="1.0" encoding="utf-8"?>
+<p:notes xmlns:a="http://schemas.openxmlformats.org/drawingml/2006/main" xmlns:p="http://schemas.openxmlformats.org/presentationml/2006/main" xmlns:r="http://schemas.openxmlformats.org/officeDocument/2006/relationships">
+  <p:cSld>
+    <p:spTree>
+      <p:nvGrpSpPr>
+        <p:cNvPr id="1" name=""/>
+        <p:cNvGrpSpPr/>
+        <p:nvPr/>
+      </p:nvGrpSpPr>
+      <p:grpSpPr>
+        <a:xfrm>
+          <a:off x="0" y="0"/>
+          <a:ext cx="0" cy="0"/>
+          <a:chOff x="0" y="0"/>
+          <a:chExt cx="0" cy="0"/>
+        </a:xfrm>
+      </p:grpSpPr>
+      <p:sp>
+        <p:nvSpPr>
+          <p:cNvPr id="2" name="Slide Image Placeholder 1"/>
+          <p:cNvSpPr>
+            <a:spLocks noGrp="1"/>
+          </p:cNvSpPr>
+          <p:nvPr>
+            <p:ph type="sldImg" idx="2"/>
+          </p:nvPr>
+        </p:nvSpPr>
+        <p:spPr/>
+      </p:sp>
+      <p:sp>
+        <p:nvSpPr>
+          <p:cNvPr id="3" name="Notes Placeholder 2"/>
+          <p:cNvSpPr>
+            <a:spLocks noGrp="1"/>
+          </p:cNvSpPr>
+          <p:nvPr>
+            <p:ph type="body" idx="3" sz="quarter"/>
+          </p:nvPr>
+        </p:nvSpPr>
+        <p:spPr/>
+        <p:txBody>
+          <a:bodyPr/>
+          <a:lstStyle/>
+          <a:p>
+            <a:r>
+              <a:t>That is the end of my presentation. Thank you for listening. I am happy to take</a:t>
+            </a:r>
+          </a:p>
+          <a:p>
+            <a:r>
+              <a:t>questions on the circuit, the choice of threshold, or the schedule.</a:t>
+            </a:r>
+          </a:p>
+        </p:txBody>
+      </p:sp>
+      <p:sp>
+        <p:nvSpPr>
+          <p:cNvPr id="4" name="Slide Number Placeholder 3"/>
+          <p:cNvSpPr>
+            <a:spLocks noGrp="1"/>
+          </p:cNvSpPr>
+          <p:nvPr>
+            <p:ph type="sldNum" idx="5" sz="quarter"/>
+          </p:nvPr>
+        </p:nvSpPr>
+        <p:spPr/>
+      </p:sp>
+    </p:spTree>
+  </p:cSld>
+  <p:clrMapOvr>
+    <a:masterClrMapping/>
+  </p:clrMapOvr>
+</p:notes>
+</file>
+
 <file path=ppt/notesSlides/notesSlide2.xml><?xml version="1.0" encoding="utf-8"?>
 <p:notes xmlns:a="http://schemas.openxmlformats.org/drawingml/2006/main" xmlns:p="http://schemas.openxmlformats.org/presentationml/2006/main" xmlns:r="http://schemas.openxmlformats.org/officeDocument/2006/relationships">
   <p:cSld>
@@ -965,37 +1041,42 @@
           <a:lstStyle/>
           <a:p>
             <a:r>
-              <a:t>This project is not one or the other. There is a circuit to build and there is</a:t>
-            </a:r>
-          </a:p>
-          <a:p>
-            <a:r>
-              <a:t>firmware to write for it, and neither works without the other. The hardware side</a:t>
-            </a:r>
-          </a:p>
-          <a:p>
-            <a:r>
-              <a:t>is the pack, the sensing, the protection MOSFETs and the enclosure. The software</a:t>
-            </a:r>
-          </a:p>
-          <a:p>
-            <a:r>
-              <a:t>side is the firmware on the ESP32 and the dashboard page. The firmware is</a:t>
-            </a:r>
-          </a:p>
-          <a:p>
-            <a:r>
-              <a:t>written in C++ on ESP-IDF, which is the framework Espressif supply for the</a:t>
-            </a:r>
-          </a:p>
-          <a:p>
-            <a:r>
-              <a:t>ESP32, and it uses FreeRTOS underneath to keep the sensor, safety and telemetry</a:t>
-            </a:r>
-          </a:p>
-          <a:p>
-            <a:r>
-              <a:t>work in separate tasks.</a:t>
+              <a:t>These are the main parts. The pack is four 18650 cells in series. Around it sit</a:t>
+            </a:r>
+          </a:p>
+          <a:p>
+            <a:r>
+              <a:t>the things that watch it: four thermistors for temperature, a resistor divider</a:t>
+            </a:r>
+          </a:p>
+          <a:p>
+            <a:r>
+              <a:t>on each cell for voltage, and one current sensor for the whole pack. The</a:t>
+            </a:r>
+          </a:p>
+          <a:p>
+            <a:r>
+              <a:t>multiplexer is there because the ESP32 does not have enough analogue pins for</a:t>
+            </a:r>
+          </a:p>
+          <a:p>
+            <a:r>
+              <a:t>four thermistors as well as four cell taps, so one pin reads all four in turn.</a:t>
+            </a:r>
+          </a:p>
+          <a:p>
+            <a:r>
+              <a:t>The MOSFETs are the switches that actually stop the current. The fuse is there</a:t>
+            </a:r>
+          </a:p>
+          <a:p>
+            <a:r>
+              <a:t>in case everything else fails. I have priced all of these and the full list with</a:t>
+            </a:r>
+          </a:p>
+          <a:p>
+            <a:r>
+              <a:t>costs will come in the next review.</a:t>
             </a:r>
           </a:p>
         </p:txBody>
@@ -1065,32 +1146,37 @@
           <a:lstStyle/>
           <a:p>
             <a:r>
-              <a:t>These five sources shaped the project. The first explains the physics: the heat</a:t>
-            </a:r>
-          </a:p>
-          <a:p>
-            <a:r>
-              <a:t>inside a cell feeds more reaction, which makes more heat, so the temperature</a:t>
-            </a:r>
-          </a:p>
-          <a:p>
-            <a:r>
-              <a:t>curve bends upward sharply. The second and fourth show that early warning is a</a:t>
-            </a:r>
-          </a:p>
-          <a:p>
-            <a:r>
-              <a:t>known open problem. The third is the closest work to mine and is where the one</a:t>
-            </a:r>
-          </a:p>
-          <a:p>
-            <a:r>
-              <a:t>degree per second figure comes from. The last is the standard my design is aimed</a:t>
-            </a:r>
-          </a:p>
-          <a:p>
-            <a:r>
-              <a:t>at, although I am not claiming certification.</a:t>
+              <a:t>This project is not one or the other. There is a circuit to build and there is</a:t>
+            </a:r>
+          </a:p>
+          <a:p>
+            <a:r>
+              <a:t>firmware to write for it, and neither works without the other. The hardware side</a:t>
+            </a:r>
+          </a:p>
+          <a:p>
+            <a:r>
+              <a:t>is the pack, the sensing, the protection MOSFETs and the enclosure. The software</a:t>
+            </a:r>
+          </a:p>
+          <a:p>
+            <a:r>
+              <a:t>side is the firmware on the ESP32 and the dashboard page. The firmware is</a:t>
+            </a:r>
+          </a:p>
+          <a:p>
+            <a:r>
+              <a:t>written in C++ on ESP-IDF, which is the framework Espressif supply for the</a:t>
+            </a:r>
+          </a:p>
+          <a:p>
+            <a:r>
+              <a:t>ESP32, and it uses FreeRTOS underneath to keep the sensor, safety and telemetry</a:t>
+            </a:r>
+          </a:p>
+          <a:p>
+            <a:r>
+              <a:t>work in separate tasks.</a:t>
             </a:r>
           </a:p>
         </p:txBody>
@@ -1160,22 +1246,32 @@
           <a:lstStyle/>
           <a:p>
             <a:r>
-              <a:t>These are the five sources, numbered in the same order as the survey table on</a:t>
-            </a:r>
-          </a:p>
-          <a:p>
-            <a:r>
-              <a:t>the previous slide. The first four are papers and reviews. The fifth is the</a:t>
-            </a:r>
-          </a:p>
-          <a:p>
-            <a:r>
-              <a:t>Indian standard for sealed lithium cells, which sets out the abuse tests a pack</a:t>
-            </a:r>
-          </a:p>
-          <a:p>
-            <a:r>
-              <a:t>of this kind is expected to survive.</a:t>
+              <a:t>These five sources shaped the project. The first explains the physics: the heat</a:t>
+            </a:r>
+          </a:p>
+          <a:p>
+            <a:r>
+              <a:t>inside a cell feeds more reaction, which makes more heat, so the temperature</a:t>
+            </a:r>
+          </a:p>
+          <a:p>
+            <a:r>
+              <a:t>curve bends upward sharply. The second and fourth show that early warning is a</a:t>
+            </a:r>
+          </a:p>
+          <a:p>
+            <a:r>
+              <a:t>known open problem. The third is the closest work to mine and is where the one</a:t>
+            </a:r>
+          </a:p>
+          <a:p>
+            <a:r>
+              <a:t>degree per second figure comes from. The last is the standard my design is aimed</a:t>
+            </a:r>
+          </a:p>
+          <a:p>
+            <a:r>
+              <a:t>at, although I am not claiming certification.</a:t>
             </a:r>
           </a:p>
         </p:txBody>
@@ -1245,12 +1341,22 @@
           <a:lstStyle/>
           <a:p>
             <a:r>
-              <a:t>That is the end of my presentation. Thank you for listening. I am happy to take</a:t>
-            </a:r>
-          </a:p>
-          <a:p>
-            <a:r>
-              <a:t>questions on the circuit, the choice of threshold, or the schedule.</a:t>
+              <a:t>These are the five sources, numbered in the same order as the survey table on</a:t>
+            </a:r>
+          </a:p>
+          <a:p>
+            <a:r>
+              <a:t>the previous slide. The first four are papers and reviews. The fifth is the</a:t>
+            </a:r>
+          </a:p>
+          <a:p>
+            <a:r>
+              <a:t>Indian standard for sealed lithium cells, which sets out the abuse tests a pack</a:t>
+            </a:r>
+          </a:p>
+          <a:p>
+            <a:r>
+              <a:t>of this kind is expected to survive.</a:t>
             </a:r>
           </a:p>
         </p:txBody>
@@ -4642,6 +4748,211 @@
 </p:sld>
 </file>
 
+<file path=ppt/slides/slide10.xml><?xml version="1.0" encoding="utf-8"?>
+<p:sld xmlns:a="http://schemas.openxmlformats.org/drawingml/2006/main" xmlns:p="http://schemas.openxmlformats.org/presentationml/2006/main" xmlns:r="http://schemas.openxmlformats.org/officeDocument/2006/relationships">
+  <p:cSld>
+    <p:spTree>
+      <p:nvGrpSpPr>
+        <p:cNvPr id="1" name=""/>
+        <p:cNvGrpSpPr/>
+        <p:nvPr/>
+      </p:nvGrpSpPr>
+      <p:grpSpPr/>
+      <p:pic>
+        <p:nvPicPr>
+          <p:cNvPr id="2" name="Picture 1" descr="logo.png"/>
+          <p:cNvPicPr>
+            <a:picLocks noChangeAspect="1"/>
+          </p:cNvPicPr>
+          <p:nvPr/>
+        </p:nvPicPr>
+        <p:blipFill>
+          <a:blip r:embed="rId2"/>
+          <a:stretch>
+            <a:fillRect/>
+          </a:stretch>
+        </p:blipFill>
+        <p:spPr>
+          <a:xfrm>
+            <a:off x="286207" y="109728"/>
+            <a:ext cx="646480" cy="950976"/>
+          </a:xfrm>
+          <a:prstGeom prst="rect">
+            <a:avLst/>
+          </a:prstGeom>
+        </p:spPr>
+      </p:pic>
+      <p:sp>
+        <p:nvSpPr>
+          <p:cNvPr id="3" name="TextBox 2"/>
+          <p:cNvSpPr txBox="1"/>
+          <p:nvPr/>
+        </p:nvSpPr>
+        <p:spPr>
+          <a:xfrm>
+            <a:off x="929944" y="6355080"/>
+            <a:ext cx="2286000" cy="292608"/>
+          </a:xfrm>
+          <a:prstGeom prst="rect">
+            <a:avLst/>
+          </a:prstGeom>
+          <a:noFill/>
+        </p:spPr>
+        <p:txBody>
+          <a:bodyPr wrap="square" lIns="0" rIns="0" tIns="0" bIns="0">
+            <a:noAutofit/>
+          </a:bodyPr>
+          <a:lstStyle/>
+          <a:p>
+            <a:r>
+              <a:rPr sz="1200" b="0" i="0" u="none">
+                <a:solidFill>
+                  <a:srgbClr val="898989"/>
+                </a:solidFill>
+                <a:latin typeface="Calibri"/>
+              </a:rPr>
+              <a:t>22-07-2026</a:t>
+            </a:r>
+          </a:p>
+        </p:txBody>
+      </p:sp>
+      <p:sp>
+        <p:nvSpPr>
+          <p:cNvPr id="4" name="TextBox 3"/>
+          <p:cNvSpPr txBox="1"/>
+          <p:nvPr/>
+        </p:nvSpPr>
+        <p:spPr>
+          <a:xfrm>
+            <a:off x="3931920" y="6355080"/>
+            <a:ext cx="4297680" cy="292608"/>
+          </a:xfrm>
+          <a:prstGeom prst="rect">
+            <a:avLst/>
+          </a:prstGeom>
+          <a:noFill/>
+        </p:spPr>
+        <p:txBody>
+          <a:bodyPr wrap="square" lIns="0" rIns="0" tIns="0" bIns="0">
+            <a:noAutofit/>
+          </a:bodyPr>
+          <a:lstStyle/>
+          <a:p>
+            <a:pPr algn="ctr"/>
+            <a:r>
+              <a:rPr sz="1200" b="0" i="0" u="none">
+                <a:solidFill>
+                  <a:srgbClr val="898989"/>
+                </a:solidFill>
+                <a:latin typeface="Calibri"/>
+              </a:rPr>
+              <a:t>Zeroth Review-2026-27</a:t>
+            </a:r>
+          </a:p>
+        </p:txBody>
+      </p:sp>
+      <p:sp>
+        <p:nvSpPr>
+          <p:cNvPr id="5" name="TextBox 4"/>
+          <p:cNvSpPr txBox="1"/>
+          <p:nvPr/>
+        </p:nvSpPr>
+        <p:spPr>
+          <a:xfrm>
+            <a:off x="10058400" y="6355080"/>
+            <a:ext cx="1204264" cy="292608"/>
+          </a:xfrm>
+          <a:prstGeom prst="rect">
+            <a:avLst/>
+          </a:prstGeom>
+          <a:noFill/>
+        </p:spPr>
+        <p:txBody>
+          <a:bodyPr wrap="square" lIns="0" rIns="0" tIns="0" bIns="0">
+            <a:noAutofit/>
+          </a:bodyPr>
+          <a:lstStyle/>
+          <a:p>
+            <a:pPr algn="r"/>
+            <a:r>
+              <a:rPr sz="1200" b="0" i="0" u="none">
+                <a:solidFill>
+                  <a:srgbClr val="898989"/>
+                </a:solidFill>
+                <a:latin typeface="Calibri"/>
+              </a:rPr>
+              <a:t>10</a:t>
+            </a:r>
+          </a:p>
+        </p:txBody>
+      </p:sp>
+      <p:sp>
+        <p:nvSpPr>
+          <p:cNvPr id="6" name="TextBox 5"/>
+          <p:cNvSpPr txBox="1"/>
+          <p:nvPr/>
+        </p:nvSpPr>
+        <p:spPr>
+          <a:xfrm>
+            <a:off x="1188720" y="2606040"/>
+            <a:ext cx="9814255" cy="1463040"/>
+          </a:xfrm>
+          <a:prstGeom prst="rect">
+            <a:avLst/>
+          </a:prstGeom>
+          <a:noFill/>
+        </p:spPr>
+        <p:txBody>
+          <a:bodyPr wrap="square" lIns="0" rIns="0" tIns="0" bIns="0">
+            <a:noAutofit/>
+          </a:bodyPr>
+          <a:lstStyle/>
+          <a:p>
+            <a:pPr algn="ctr"/>
+            <a:r>
+              <a:rPr sz="4000" b="1" i="0" u="none">
+                <a:solidFill>
+                  <a:srgbClr val="000000"/>
+                </a:solidFill>
+                <a:latin typeface="Times New Roman"/>
+              </a:rPr>
+              <a:t>Thank You</a:t>
+            </a:r>
+          </a:p>
+          <a:p>
+            <a:pPr algn="ctr"/>
+            <a:r>
+              <a:rPr sz="1800" b="0" i="0" u="none">
+                <a:solidFill>
+                  <a:srgbClr val="000000"/>
+                </a:solidFill>
+                <a:latin typeface="Times New Roman"/>
+              </a:rPr>
+              <a:t/>
+            </a:r>
+          </a:p>
+          <a:p>
+            <a:pPr algn="ctr"/>
+            <a:r>
+              <a:rPr sz="2000" b="0" i="0" u="none">
+                <a:solidFill>
+                  <a:srgbClr val="002060"/>
+                </a:solidFill>
+                <a:latin typeface="Times New Roman"/>
+              </a:rPr>
+              <a:t>Questions are welcome</a:t>
+            </a:r>
+          </a:p>
+        </p:txBody>
+      </p:sp>
+    </p:spTree>
+  </p:cSld>
+  <p:clrMapOvr>
+    <a:masterClrMapping/>
+  </p:clrMapOvr>
+</p:sld>
+</file>
+
 <file path=ppt/slides/slide2.xml><?xml version="1.0" encoding="utf-8"?>
 <p:sld xmlns:a="http://schemas.openxmlformats.org/drawingml/2006/main" xmlns:p="http://schemas.openxmlformats.org/presentationml/2006/main" xmlns:r="http://schemas.openxmlformats.org/officeDocument/2006/relationships">
   <p:cSld>
@@ -4978,7 +5289,7 @@
                 </a:solidFill>
                 <a:latin typeface="Times New Roman"/>
               </a:rPr>
-              <a:t>Implementation and Tools</a:t>
+              <a:t>Components</a:t>
             </a:r>
           </a:p>
           <a:p>
@@ -5007,7 +5318,7 @@
                 </a:solidFill>
                 <a:latin typeface="Times New Roman"/>
               </a:rPr>
-              <a:t>Literature Survey</a:t>
+              <a:t>Implementation and Tools</a:t>
             </a:r>
           </a:p>
           <a:p>
@@ -5028,6 +5339,35 @@
                 <a:latin typeface="Times New Roman"/>
               </a:rPr>
               <a:t>7.  </a:t>
+            </a:r>
+            <a:r>
+              <a:rPr sz="1800" b="0" i="0" u="none">
+                <a:solidFill>
+                  <a:srgbClr val="000000"/>
+                </a:solidFill>
+                <a:latin typeface="Times New Roman"/>
+              </a:rPr>
+              <a:t>Literature Survey</a:t>
+            </a:r>
+          </a:p>
+          <a:p>
+            <a:pPr marL="384048" indent="-384048">
+              <a:lnSpc>
+                <a:spcPct val="110000"/>
+              </a:lnSpc>
+              <a:spcAft>
+                <a:spcPts val="1300"/>
+              </a:spcAft>
+              <a:buNone/>
+            </a:pPr>
+            <a:r>
+              <a:rPr sz="1800" b="0" i="0" u="none">
+                <a:solidFill>
+                  <a:srgbClr val="000000"/>
+                </a:solidFill>
+                <a:latin typeface="Times New Roman"/>
+              </a:rPr>
+              <a:t>8.  </a:t>
             </a:r>
             <a:r>
               <a:rPr sz="1800" b="0" i="0" u="none">
@@ -6067,7 +6407,7 @@
                 </a:solidFill>
                 <a:latin typeface="Times New Roman"/>
               </a:rPr>
-              <a:t>Implementation and Tools</a:t>
+              <a:t>Components</a:t>
             </a:r>
           </a:p>
         </p:txBody>
@@ -6172,6 +6512,995 @@
                 <a:latin typeface="Calibri"/>
               </a:rPr>
               <a:t>6</a:t>
+            </a:r>
+          </a:p>
+        </p:txBody>
+      </p:sp>
+      <p:graphicFrame>
+        <p:nvGraphicFramePr>
+          <p:cNvPr id="7" name="Table 6"/>
+          <p:cNvGraphicFramePr>
+            <a:graphicFrameLocks noGrp="1"/>
+          </p:cNvGraphicFramePr>
+          <p:nvPr/>
+        </p:nvGraphicFramePr>
+        <p:xfrm>
+          <a:off x="998067" y="1389888"/>
+          <a:ext cx="10195560" cy="4425696"/>
+        </p:xfrm>
+        <a:graphic>
+          <a:graphicData uri="http://schemas.openxmlformats.org/drawingml/2006/table">
+            <a:tbl>
+              <a:tblPr firstRow="1">
+                <a:tableStyleId>{5C22544A-7EE6-4342-B048-85BDC9FD1C3A}</a:tableStyleId>
+              </a:tblPr>
+              <a:tblGrid>
+                <a:gridCol w="3200400"/>
+                <a:gridCol w="1371600"/>
+                <a:gridCol w="5623560"/>
+              </a:tblGrid>
+              <a:tr h="402336">
+                <a:tc>
+                  <a:txBody>
+                    <a:bodyPr/>
+                    <a:lstStyle/>
+                    <a:p>
+                      <a:pPr algn="ctr"/>
+                      <a:r>
+                        <a:rPr sz="1500" b="1" i="0" u="none">
+                          <a:solidFill>
+                            <a:srgbClr val="FFFFFF"/>
+                          </a:solidFill>
+                          <a:latin typeface="Times New Roman"/>
+                        </a:rPr>
+                        <a:t>Component</a:t>
+                      </a:r>
+                    </a:p>
+                  </a:txBody>
+                  <a:tcPr anchor="ctr" marL="64008" marR="64008">
+                    <a:solidFill>
+                      <a:srgbClr val="002060"/>
+                    </a:solidFill>
+                  </a:tcPr>
+                </a:tc>
+                <a:tc>
+                  <a:txBody>
+                    <a:bodyPr/>
+                    <a:lstStyle/>
+                    <a:p>
+                      <a:pPr algn="ctr"/>
+                      <a:r>
+                        <a:rPr sz="1500" b="1" i="0" u="none">
+                          <a:solidFill>
+                            <a:srgbClr val="FFFFFF"/>
+                          </a:solidFill>
+                          <a:latin typeface="Times New Roman"/>
+                        </a:rPr>
+                        <a:t>How many</a:t>
+                      </a:r>
+                    </a:p>
+                  </a:txBody>
+                  <a:tcPr anchor="ctr" marL="64008" marR="64008">
+                    <a:solidFill>
+                      <a:srgbClr val="002060"/>
+                    </a:solidFill>
+                  </a:tcPr>
+                </a:tc>
+                <a:tc>
+                  <a:txBody>
+                    <a:bodyPr/>
+                    <a:lstStyle/>
+                    <a:p>
+                      <a:pPr algn="ctr"/>
+                      <a:r>
+                        <a:rPr sz="1500" b="1" i="0" u="none">
+                          <a:solidFill>
+                            <a:srgbClr val="FFFFFF"/>
+                          </a:solidFill>
+                          <a:latin typeface="Times New Roman"/>
+                        </a:rPr>
+                        <a:t>What it does</a:t>
+                      </a:r>
+                    </a:p>
+                  </a:txBody>
+                  <a:tcPr anchor="ctr" marL="64008" marR="64008">
+                    <a:solidFill>
+                      <a:srgbClr val="002060"/>
+                    </a:solidFill>
+                  </a:tcPr>
+                </a:tc>
+              </a:tr>
+              <a:tr h="402336">
+                <a:tc>
+                  <a:txBody>
+                    <a:bodyPr/>
+                    <a:lstStyle/>
+                    <a:p>
+                      <a:pPr algn="l"/>
+                      <a:r>
+                        <a:rPr sz="1500" b="0" i="0" u="none">
+                          <a:solidFill>
+                            <a:srgbClr val="000000"/>
+                          </a:solidFill>
+                          <a:latin typeface="Times New Roman"/>
+                        </a:rPr>
+                        <a:t>18650 lithium-ion cells</a:t>
+                      </a:r>
+                    </a:p>
+                  </a:txBody>
+                  <a:tcPr anchor="ctr" marL="64008" marR="64008" marT="27432" marB="27432">
+                    <a:solidFill>
+                      <a:srgbClr val="FFFFFF"/>
+                    </a:solidFill>
+                  </a:tcPr>
+                </a:tc>
+                <a:tc>
+                  <a:txBody>
+                    <a:bodyPr/>
+                    <a:lstStyle/>
+                    <a:p>
+                      <a:pPr algn="ctr"/>
+                      <a:r>
+                        <a:rPr sz="1500" b="0" i="0" u="none">
+                          <a:solidFill>
+                            <a:srgbClr val="000000"/>
+                          </a:solidFill>
+                          <a:latin typeface="Times New Roman"/>
+                        </a:rPr>
+                        <a:t>4</a:t>
+                      </a:r>
+                    </a:p>
+                  </a:txBody>
+                  <a:tcPr anchor="ctr" marL="64008" marR="64008" marT="27432" marB="27432">
+                    <a:solidFill>
+                      <a:srgbClr val="FFFFFF"/>
+                    </a:solidFill>
+                  </a:tcPr>
+                </a:tc>
+                <a:tc>
+                  <a:txBody>
+                    <a:bodyPr/>
+                    <a:lstStyle/>
+                    <a:p>
+                      <a:pPr algn="l"/>
+                      <a:r>
+                        <a:rPr sz="1500" b="0" i="0" u="none">
+                          <a:solidFill>
+                            <a:srgbClr val="000000"/>
+                          </a:solidFill>
+                          <a:latin typeface="Times New Roman"/>
+                        </a:rPr>
+                        <a:t>The battery pack the system looks after</a:t>
+                      </a:r>
+                    </a:p>
+                  </a:txBody>
+                  <a:tcPr anchor="ctr" marL="64008" marR="64008" marT="27432" marB="27432">
+                    <a:solidFill>
+                      <a:srgbClr val="FFFFFF"/>
+                    </a:solidFill>
+                  </a:tcPr>
+                </a:tc>
+              </a:tr>
+              <a:tr h="402336">
+                <a:tc>
+                  <a:txBody>
+                    <a:bodyPr/>
+                    <a:lstStyle/>
+                    <a:p>
+                      <a:pPr algn="l"/>
+                      <a:r>
+                        <a:rPr sz="1500" b="0" i="0" u="none">
+                          <a:solidFill>
+                            <a:srgbClr val="000000"/>
+                          </a:solidFill>
+                          <a:latin typeface="Times New Roman"/>
+                        </a:rPr>
+                        <a:t>ESP32 board</a:t>
+                      </a:r>
+                    </a:p>
+                  </a:txBody>
+                  <a:tcPr anchor="ctr" marL="64008" marR="64008" marT="27432" marB="27432">
+                    <a:solidFill>
+                      <a:srgbClr val="EDEDED"/>
+                    </a:solidFill>
+                  </a:tcPr>
+                </a:tc>
+                <a:tc>
+                  <a:txBody>
+                    <a:bodyPr/>
+                    <a:lstStyle/>
+                    <a:p>
+                      <a:pPr algn="ctr"/>
+                      <a:r>
+                        <a:rPr sz="1500" b="0" i="0" u="none">
+                          <a:solidFill>
+                            <a:srgbClr val="000000"/>
+                          </a:solidFill>
+                          <a:latin typeface="Times New Roman"/>
+                        </a:rPr>
+                        <a:t>1</a:t>
+                      </a:r>
+                    </a:p>
+                  </a:txBody>
+                  <a:tcPr anchor="ctr" marL="64008" marR="64008" marT="27432" marB="27432">
+                    <a:solidFill>
+                      <a:srgbClr val="EDEDED"/>
+                    </a:solidFill>
+                  </a:tcPr>
+                </a:tc>
+                <a:tc>
+                  <a:txBody>
+                    <a:bodyPr/>
+                    <a:lstStyle/>
+                    <a:p>
+                      <a:pPr algn="l"/>
+                      <a:r>
+                        <a:rPr sz="1500" b="0" i="0" u="none">
+                          <a:solidFill>
+                            <a:srgbClr val="000000"/>
+                          </a:solidFill>
+                          <a:latin typeface="Times New Roman"/>
+                        </a:rPr>
+                        <a:t>Reads the sensors and decides when to cut off</a:t>
+                      </a:r>
+                    </a:p>
+                  </a:txBody>
+                  <a:tcPr anchor="ctr" marL="64008" marR="64008" marT="27432" marB="27432">
+                    <a:solidFill>
+                      <a:srgbClr val="EDEDED"/>
+                    </a:solidFill>
+                  </a:tcPr>
+                </a:tc>
+              </a:tr>
+              <a:tr h="402336">
+                <a:tc>
+                  <a:txBody>
+                    <a:bodyPr/>
+                    <a:lstStyle/>
+                    <a:p>
+                      <a:pPr algn="l"/>
+                      <a:r>
+                        <a:rPr sz="1500" b="0" i="0" u="none">
+                          <a:solidFill>
+                            <a:srgbClr val="000000"/>
+                          </a:solidFill>
+                          <a:latin typeface="Times New Roman"/>
+                        </a:rPr>
+                        <a:t>NTC thermistors</a:t>
+                      </a:r>
+                    </a:p>
+                  </a:txBody>
+                  <a:tcPr anchor="ctr" marL="64008" marR="64008" marT="27432" marB="27432">
+                    <a:solidFill>
+                      <a:srgbClr val="FFFFFF"/>
+                    </a:solidFill>
+                  </a:tcPr>
+                </a:tc>
+                <a:tc>
+                  <a:txBody>
+                    <a:bodyPr/>
+                    <a:lstStyle/>
+                    <a:p>
+                      <a:pPr algn="ctr"/>
+                      <a:r>
+                        <a:rPr sz="1500" b="0" i="0" u="none">
+                          <a:solidFill>
+                            <a:srgbClr val="000000"/>
+                          </a:solidFill>
+                          <a:latin typeface="Times New Roman"/>
+                        </a:rPr>
+                        <a:t>4</a:t>
+                      </a:r>
+                    </a:p>
+                  </a:txBody>
+                  <a:tcPr anchor="ctr" marL="64008" marR="64008" marT="27432" marB="27432">
+                    <a:solidFill>
+                      <a:srgbClr val="FFFFFF"/>
+                    </a:solidFill>
+                  </a:tcPr>
+                </a:tc>
+                <a:tc>
+                  <a:txBody>
+                    <a:bodyPr/>
+                    <a:lstStyle/>
+                    <a:p>
+                      <a:pPr algn="l"/>
+                      <a:r>
+                        <a:rPr sz="1500" b="0" i="0" u="none">
+                          <a:solidFill>
+                            <a:srgbClr val="000000"/>
+                          </a:solidFill>
+                          <a:latin typeface="Times New Roman"/>
+                        </a:rPr>
+                        <a:t>Measure the temperature of each cell</a:t>
+                      </a:r>
+                    </a:p>
+                  </a:txBody>
+                  <a:tcPr anchor="ctr" marL="64008" marR="64008" marT="27432" marB="27432">
+                    <a:solidFill>
+                      <a:srgbClr val="FFFFFF"/>
+                    </a:solidFill>
+                  </a:tcPr>
+                </a:tc>
+              </a:tr>
+              <a:tr h="402336">
+                <a:tc>
+                  <a:txBody>
+                    <a:bodyPr/>
+                    <a:lstStyle/>
+                    <a:p>
+                      <a:pPr algn="l"/>
+                      <a:r>
+                        <a:rPr sz="1500" b="0" i="0" u="none">
+                          <a:solidFill>
+                            <a:srgbClr val="000000"/>
+                          </a:solidFill>
+                          <a:latin typeface="Times New Roman"/>
+                        </a:rPr>
+                        <a:t>Resistor dividers</a:t>
+                      </a:r>
+                    </a:p>
+                  </a:txBody>
+                  <a:tcPr anchor="ctr" marL="64008" marR="64008" marT="27432" marB="27432">
+                    <a:solidFill>
+                      <a:srgbClr val="EDEDED"/>
+                    </a:solidFill>
+                  </a:tcPr>
+                </a:tc>
+                <a:tc>
+                  <a:txBody>
+                    <a:bodyPr/>
+                    <a:lstStyle/>
+                    <a:p>
+                      <a:pPr algn="ctr"/>
+                      <a:r>
+                        <a:rPr sz="1500" b="0" i="0" u="none">
+                          <a:solidFill>
+                            <a:srgbClr val="000000"/>
+                          </a:solidFill>
+                          <a:latin typeface="Times New Roman"/>
+                        </a:rPr>
+                        <a:t>4</a:t>
+                      </a:r>
+                    </a:p>
+                  </a:txBody>
+                  <a:tcPr anchor="ctr" marL="64008" marR="64008" marT="27432" marB="27432">
+                    <a:solidFill>
+                      <a:srgbClr val="EDEDED"/>
+                    </a:solidFill>
+                  </a:tcPr>
+                </a:tc>
+                <a:tc>
+                  <a:txBody>
+                    <a:bodyPr/>
+                    <a:lstStyle/>
+                    <a:p>
+                      <a:pPr algn="l"/>
+                      <a:r>
+                        <a:rPr sz="1500" b="0" i="0" u="none">
+                          <a:solidFill>
+                            <a:srgbClr val="000000"/>
+                          </a:solidFill>
+                          <a:latin typeface="Times New Roman"/>
+                        </a:rPr>
+                        <a:t>Bring each cell voltage down to a level the ESP32 can read</a:t>
+                      </a:r>
+                    </a:p>
+                  </a:txBody>
+                  <a:tcPr anchor="ctr" marL="64008" marR="64008" marT="27432" marB="27432">
+                    <a:solidFill>
+                      <a:srgbClr val="EDEDED"/>
+                    </a:solidFill>
+                  </a:tcPr>
+                </a:tc>
+              </a:tr>
+              <a:tr h="402336">
+                <a:tc>
+                  <a:txBody>
+                    <a:bodyPr/>
+                    <a:lstStyle/>
+                    <a:p>
+                      <a:pPr algn="l"/>
+                      <a:r>
+                        <a:rPr sz="1500" b="0" i="0" u="none">
+                          <a:solidFill>
+                            <a:srgbClr val="000000"/>
+                          </a:solidFill>
+                          <a:latin typeface="Times New Roman"/>
+                        </a:rPr>
+                        <a:t>Current sensor with shunt</a:t>
+                      </a:r>
+                    </a:p>
+                  </a:txBody>
+                  <a:tcPr anchor="ctr" marL="64008" marR="64008" marT="27432" marB="27432">
+                    <a:solidFill>
+                      <a:srgbClr val="FFFFFF"/>
+                    </a:solidFill>
+                  </a:tcPr>
+                </a:tc>
+                <a:tc>
+                  <a:txBody>
+                    <a:bodyPr/>
+                    <a:lstStyle/>
+                    <a:p>
+                      <a:pPr algn="ctr"/>
+                      <a:r>
+                        <a:rPr sz="1500" b="0" i="0" u="none">
+                          <a:solidFill>
+                            <a:srgbClr val="000000"/>
+                          </a:solidFill>
+                          <a:latin typeface="Times New Roman"/>
+                        </a:rPr>
+                        <a:t>1</a:t>
+                      </a:r>
+                    </a:p>
+                  </a:txBody>
+                  <a:tcPr anchor="ctr" marL="64008" marR="64008" marT="27432" marB="27432">
+                    <a:solidFill>
+                      <a:srgbClr val="FFFFFF"/>
+                    </a:solidFill>
+                  </a:tcPr>
+                </a:tc>
+                <a:tc>
+                  <a:txBody>
+                    <a:bodyPr/>
+                    <a:lstStyle/>
+                    <a:p>
+                      <a:pPr algn="l"/>
+                      <a:r>
+                        <a:rPr sz="1500" b="0" i="0" u="none">
+                          <a:solidFill>
+                            <a:srgbClr val="000000"/>
+                          </a:solidFill>
+                          <a:latin typeface="Times New Roman"/>
+                        </a:rPr>
+                        <a:t>Measures the current going into and out of the pack</a:t>
+                      </a:r>
+                    </a:p>
+                  </a:txBody>
+                  <a:tcPr anchor="ctr" marL="64008" marR="64008" marT="27432" marB="27432">
+                    <a:solidFill>
+                      <a:srgbClr val="FFFFFF"/>
+                    </a:solidFill>
+                  </a:tcPr>
+                </a:tc>
+              </a:tr>
+              <a:tr h="402336">
+                <a:tc>
+                  <a:txBody>
+                    <a:bodyPr/>
+                    <a:lstStyle/>
+                    <a:p>
+                      <a:pPr algn="l"/>
+                      <a:r>
+                        <a:rPr sz="1500" b="0" i="0" u="none">
+                          <a:solidFill>
+                            <a:srgbClr val="000000"/>
+                          </a:solidFill>
+                          <a:latin typeface="Times New Roman"/>
+                        </a:rPr>
+                        <a:t>Analogue multiplexer</a:t>
+                      </a:r>
+                    </a:p>
+                  </a:txBody>
+                  <a:tcPr anchor="ctr" marL="64008" marR="64008" marT="27432" marB="27432">
+                    <a:solidFill>
+                      <a:srgbClr val="EDEDED"/>
+                    </a:solidFill>
+                  </a:tcPr>
+                </a:tc>
+                <a:tc>
+                  <a:txBody>
+                    <a:bodyPr/>
+                    <a:lstStyle/>
+                    <a:p>
+                      <a:pPr algn="ctr"/>
+                      <a:r>
+                        <a:rPr sz="1500" b="0" i="0" u="none">
+                          <a:solidFill>
+                            <a:srgbClr val="000000"/>
+                          </a:solidFill>
+                          <a:latin typeface="Times New Roman"/>
+                        </a:rPr>
+                        <a:t>1</a:t>
+                      </a:r>
+                    </a:p>
+                  </a:txBody>
+                  <a:tcPr anchor="ctr" marL="64008" marR="64008" marT="27432" marB="27432">
+                    <a:solidFill>
+                      <a:srgbClr val="EDEDED"/>
+                    </a:solidFill>
+                  </a:tcPr>
+                </a:tc>
+                <a:tc>
+                  <a:txBody>
+                    <a:bodyPr/>
+                    <a:lstStyle/>
+                    <a:p>
+                      <a:pPr algn="l"/>
+                      <a:r>
+                        <a:rPr sz="1500" b="0" i="0" u="none">
+                          <a:solidFill>
+                            <a:srgbClr val="000000"/>
+                          </a:solidFill>
+                          <a:latin typeface="Times New Roman"/>
+                        </a:rPr>
+                        <a:t>Lets one input pin read all four thermistors</a:t>
+                      </a:r>
+                    </a:p>
+                  </a:txBody>
+                  <a:tcPr anchor="ctr" marL="64008" marR="64008" marT="27432" marB="27432">
+                    <a:solidFill>
+                      <a:srgbClr val="EDEDED"/>
+                    </a:solidFill>
+                  </a:tcPr>
+                </a:tc>
+              </a:tr>
+              <a:tr h="402336">
+                <a:tc>
+                  <a:txBody>
+                    <a:bodyPr/>
+                    <a:lstStyle/>
+                    <a:p>
+                      <a:pPr algn="l"/>
+                      <a:r>
+                        <a:rPr sz="1500" b="0" i="0" u="none">
+                          <a:solidFill>
+                            <a:srgbClr val="000000"/>
+                          </a:solidFill>
+                          <a:latin typeface="Times New Roman"/>
+                        </a:rPr>
+                        <a:t>MOSFETs</a:t>
+                      </a:r>
+                    </a:p>
+                  </a:txBody>
+                  <a:tcPr anchor="ctr" marL="64008" marR="64008" marT="27432" marB="27432">
+                    <a:solidFill>
+                      <a:srgbClr val="FFFFFF"/>
+                    </a:solidFill>
+                  </a:tcPr>
+                </a:tc>
+                <a:tc>
+                  <a:txBody>
+                    <a:bodyPr/>
+                    <a:lstStyle/>
+                    <a:p>
+                      <a:pPr algn="ctr"/>
+                      <a:r>
+                        <a:rPr sz="1500" b="0" i="0" u="none">
+                          <a:solidFill>
+                            <a:srgbClr val="000000"/>
+                          </a:solidFill>
+                          <a:latin typeface="Times New Roman"/>
+                        </a:rPr>
+                        <a:t>2</a:t>
+                      </a:r>
+                    </a:p>
+                  </a:txBody>
+                  <a:tcPr anchor="ctr" marL="64008" marR="64008" marT="27432" marB="27432">
+                    <a:solidFill>
+                      <a:srgbClr val="FFFFFF"/>
+                    </a:solidFill>
+                  </a:tcPr>
+                </a:tc>
+                <a:tc>
+                  <a:txBody>
+                    <a:bodyPr/>
+                    <a:lstStyle/>
+                    <a:p>
+                      <a:pPr algn="l"/>
+                      <a:r>
+                        <a:rPr sz="1500" b="0" i="0" u="none">
+                          <a:solidFill>
+                            <a:srgbClr val="000000"/>
+                          </a:solidFill>
+                          <a:latin typeface="Times New Roman"/>
+                        </a:rPr>
+                        <a:t>The switches that stop charging and discharging</a:t>
+                      </a:r>
+                    </a:p>
+                  </a:txBody>
+                  <a:tcPr anchor="ctr" marL="64008" marR="64008" marT="27432" marB="27432">
+                    <a:solidFill>
+                      <a:srgbClr val="FFFFFF"/>
+                    </a:solidFill>
+                  </a:tcPr>
+                </a:tc>
+              </a:tr>
+              <a:tr h="402336">
+                <a:tc>
+                  <a:txBody>
+                    <a:bodyPr/>
+                    <a:lstStyle/>
+                    <a:p>
+                      <a:pPr algn="l"/>
+                      <a:r>
+                        <a:rPr sz="1500" b="0" i="0" u="none">
+                          <a:solidFill>
+                            <a:srgbClr val="000000"/>
+                          </a:solidFill>
+                          <a:latin typeface="Times New Roman"/>
+                        </a:rPr>
+                        <a:t>Bleed resistors</a:t>
+                      </a:r>
+                    </a:p>
+                  </a:txBody>
+                  <a:tcPr anchor="ctr" marL="64008" marR="64008" marT="27432" marB="27432">
+                    <a:solidFill>
+                      <a:srgbClr val="EDEDED"/>
+                    </a:solidFill>
+                  </a:tcPr>
+                </a:tc>
+                <a:tc>
+                  <a:txBody>
+                    <a:bodyPr/>
+                    <a:lstStyle/>
+                    <a:p>
+                      <a:pPr algn="ctr"/>
+                      <a:r>
+                        <a:rPr sz="1500" b="0" i="0" u="none">
+                          <a:solidFill>
+                            <a:srgbClr val="000000"/>
+                          </a:solidFill>
+                          <a:latin typeface="Times New Roman"/>
+                        </a:rPr>
+                        <a:t>4</a:t>
+                      </a:r>
+                    </a:p>
+                  </a:txBody>
+                  <a:tcPr anchor="ctr" marL="64008" marR="64008" marT="27432" marB="27432">
+                    <a:solidFill>
+                      <a:srgbClr val="EDEDED"/>
+                    </a:solidFill>
+                  </a:tcPr>
+                </a:tc>
+                <a:tc>
+                  <a:txBody>
+                    <a:bodyPr/>
+                    <a:lstStyle/>
+                    <a:p>
+                      <a:pPr algn="l"/>
+                      <a:r>
+                        <a:rPr sz="1500" b="0" i="0" u="none">
+                          <a:solidFill>
+                            <a:srgbClr val="000000"/>
+                          </a:solidFill>
+                          <a:latin typeface="Times New Roman"/>
+                        </a:rPr>
+                        <a:t>Drain a little charge from a cell that is fuller than the rest</a:t>
+                      </a:r>
+                    </a:p>
+                  </a:txBody>
+                  <a:tcPr anchor="ctr" marL="64008" marR="64008" marT="27432" marB="27432">
+                    <a:solidFill>
+                      <a:srgbClr val="EDEDED"/>
+                    </a:solidFill>
+                  </a:tcPr>
+                </a:tc>
+              </a:tr>
+              <a:tr h="402336">
+                <a:tc>
+                  <a:txBody>
+                    <a:bodyPr/>
+                    <a:lstStyle/>
+                    <a:p>
+                      <a:pPr algn="l"/>
+                      <a:r>
+                        <a:rPr sz="1500" b="0" i="0" u="none">
+                          <a:solidFill>
+                            <a:srgbClr val="000000"/>
+                          </a:solidFill>
+                          <a:latin typeface="Times New Roman"/>
+                        </a:rPr>
+                        <a:t>Buck converter</a:t>
+                      </a:r>
+                    </a:p>
+                  </a:txBody>
+                  <a:tcPr anchor="ctr" marL="64008" marR="64008" marT="27432" marB="27432">
+                    <a:solidFill>
+                      <a:srgbClr val="FFFFFF"/>
+                    </a:solidFill>
+                  </a:tcPr>
+                </a:tc>
+                <a:tc>
+                  <a:txBody>
+                    <a:bodyPr/>
+                    <a:lstStyle/>
+                    <a:p>
+                      <a:pPr algn="ctr"/>
+                      <a:r>
+                        <a:rPr sz="1500" b="0" i="0" u="none">
+                          <a:solidFill>
+                            <a:srgbClr val="000000"/>
+                          </a:solidFill>
+                          <a:latin typeface="Times New Roman"/>
+                        </a:rPr>
+                        <a:t>1</a:t>
+                      </a:r>
+                    </a:p>
+                  </a:txBody>
+                  <a:tcPr anchor="ctr" marL="64008" marR="64008" marT="27432" marB="27432">
+                    <a:solidFill>
+                      <a:srgbClr val="FFFFFF"/>
+                    </a:solidFill>
+                  </a:tcPr>
+                </a:tc>
+                <a:tc>
+                  <a:txBody>
+                    <a:bodyPr/>
+                    <a:lstStyle/>
+                    <a:p>
+                      <a:pPr algn="l"/>
+                      <a:r>
+                        <a:rPr sz="1500" b="0" i="0" u="none">
+                          <a:solidFill>
+                            <a:srgbClr val="000000"/>
+                          </a:solidFill>
+                          <a:latin typeface="Times New Roman"/>
+                        </a:rPr>
+                        <a:t>Makes the 3.3 V supply for the ESP32 from the pack</a:t>
+                      </a:r>
+                    </a:p>
+                  </a:txBody>
+                  <a:tcPr anchor="ctr" marL="64008" marR="64008" marT="27432" marB="27432">
+                    <a:solidFill>
+                      <a:srgbClr val="FFFFFF"/>
+                    </a:solidFill>
+                  </a:tcPr>
+                </a:tc>
+              </a:tr>
+              <a:tr h="402336">
+                <a:tc>
+                  <a:txBody>
+                    <a:bodyPr/>
+                    <a:lstStyle/>
+                    <a:p>
+                      <a:pPr algn="l"/>
+                      <a:r>
+                        <a:rPr sz="1500" b="0" i="0" u="none">
+                          <a:solidFill>
+                            <a:srgbClr val="000000"/>
+                          </a:solidFill>
+                          <a:latin typeface="Times New Roman"/>
+                        </a:rPr>
+                        <a:t>Fuse</a:t>
+                      </a:r>
+                    </a:p>
+                  </a:txBody>
+                  <a:tcPr anchor="ctr" marL="64008" marR="64008" marT="27432" marB="27432">
+                    <a:solidFill>
+                      <a:srgbClr val="EDEDED"/>
+                    </a:solidFill>
+                  </a:tcPr>
+                </a:tc>
+                <a:tc>
+                  <a:txBody>
+                    <a:bodyPr/>
+                    <a:lstStyle/>
+                    <a:p>
+                      <a:pPr algn="ctr"/>
+                      <a:r>
+                        <a:rPr sz="1500" b="0" i="0" u="none">
+                          <a:solidFill>
+                            <a:srgbClr val="000000"/>
+                          </a:solidFill>
+                          <a:latin typeface="Times New Roman"/>
+                        </a:rPr>
+                        <a:t>1</a:t>
+                      </a:r>
+                    </a:p>
+                  </a:txBody>
+                  <a:tcPr anchor="ctr" marL="64008" marR="64008" marT="27432" marB="27432">
+                    <a:solidFill>
+                      <a:srgbClr val="EDEDED"/>
+                    </a:solidFill>
+                  </a:tcPr>
+                </a:tc>
+                <a:tc>
+                  <a:txBody>
+                    <a:bodyPr/>
+                    <a:lstStyle/>
+                    <a:p>
+                      <a:pPr algn="l"/>
+                      <a:r>
+                        <a:rPr sz="1500" b="0" i="0" u="none">
+                          <a:solidFill>
+                            <a:srgbClr val="000000"/>
+                          </a:solidFill>
+                          <a:latin typeface="Times New Roman"/>
+                        </a:rPr>
+                        <a:t>The last protection if the electronics fail</a:t>
+                      </a:r>
+                    </a:p>
+                  </a:txBody>
+                  <a:tcPr anchor="ctr" marL="64008" marR="64008" marT="27432" marB="27432">
+                    <a:solidFill>
+                      <a:srgbClr val="EDEDED"/>
+                    </a:solidFill>
+                  </a:tcPr>
+                </a:tc>
+              </a:tr>
+            </a:tbl>
+          </a:graphicData>
+        </a:graphic>
+      </p:graphicFrame>
+    </p:spTree>
+  </p:cSld>
+  <p:clrMapOvr>
+    <a:masterClrMapping/>
+  </p:clrMapOvr>
+</p:sld>
+</file>
+
+<file path=ppt/slides/slide7.xml><?xml version="1.0" encoding="utf-8"?>
+<p:sld xmlns:a="http://schemas.openxmlformats.org/drawingml/2006/main" xmlns:p="http://schemas.openxmlformats.org/presentationml/2006/main" xmlns:r="http://schemas.openxmlformats.org/officeDocument/2006/relationships">
+  <p:cSld>
+    <p:spTree>
+      <p:nvGrpSpPr>
+        <p:cNvPr id="1" name=""/>
+        <p:cNvGrpSpPr/>
+        <p:nvPr/>
+      </p:nvGrpSpPr>
+      <p:grpSpPr/>
+      <p:pic>
+        <p:nvPicPr>
+          <p:cNvPr id="2" name="Picture 1" descr="logo.png"/>
+          <p:cNvPicPr>
+            <a:picLocks noChangeAspect="1"/>
+          </p:cNvPicPr>
+          <p:nvPr/>
+        </p:nvPicPr>
+        <p:blipFill>
+          <a:blip r:embed="rId2"/>
+          <a:stretch>
+            <a:fillRect/>
+          </a:stretch>
+        </p:blipFill>
+        <p:spPr>
+          <a:xfrm>
+            <a:off x="286207" y="109728"/>
+            <a:ext cx="646480" cy="950976"/>
+          </a:xfrm>
+          <a:prstGeom prst="rect">
+            <a:avLst/>
+          </a:prstGeom>
+        </p:spPr>
+      </p:pic>
+      <p:sp>
+        <p:nvSpPr>
+          <p:cNvPr id="3" name="TextBox 2"/>
+          <p:cNvSpPr txBox="1"/>
+          <p:nvPr/>
+        </p:nvSpPr>
+        <p:spPr>
+          <a:xfrm>
+            <a:off x="1188720" y="384048"/>
+            <a:ext cx="9814255" cy="548640"/>
+          </a:xfrm>
+          <a:prstGeom prst="rect">
+            <a:avLst/>
+          </a:prstGeom>
+          <a:noFill/>
+        </p:spPr>
+        <p:txBody>
+          <a:bodyPr wrap="square" lIns="0" rIns="0" tIns="0" bIns="0">
+            <a:noAutofit/>
+          </a:bodyPr>
+          <a:lstStyle/>
+          <a:p>
+            <a:pPr algn="ctr"/>
+            <a:r>
+              <a:rPr sz="2400" b="1" i="0" u="sng">
+                <a:solidFill>
+                  <a:srgbClr val="000000"/>
+                </a:solidFill>
+                <a:latin typeface="Times New Roman"/>
+              </a:rPr>
+              <a:t>Implementation and Tools</a:t>
+            </a:r>
+          </a:p>
+        </p:txBody>
+      </p:sp>
+      <p:sp>
+        <p:nvSpPr>
+          <p:cNvPr id="4" name="TextBox 3"/>
+          <p:cNvSpPr txBox="1"/>
+          <p:nvPr/>
+        </p:nvSpPr>
+        <p:spPr>
+          <a:xfrm>
+            <a:off x="929944" y="6355080"/>
+            <a:ext cx="2286000" cy="292608"/>
+          </a:xfrm>
+          <a:prstGeom prst="rect">
+            <a:avLst/>
+          </a:prstGeom>
+          <a:noFill/>
+        </p:spPr>
+        <p:txBody>
+          <a:bodyPr wrap="square" lIns="0" rIns="0" tIns="0" bIns="0">
+            <a:noAutofit/>
+          </a:bodyPr>
+          <a:lstStyle/>
+          <a:p>
+            <a:r>
+              <a:rPr sz="1200" b="0" i="0" u="none">
+                <a:solidFill>
+                  <a:srgbClr val="898989"/>
+                </a:solidFill>
+                <a:latin typeface="Calibri"/>
+              </a:rPr>
+              <a:t>22-07-2026</a:t>
+            </a:r>
+          </a:p>
+        </p:txBody>
+      </p:sp>
+      <p:sp>
+        <p:nvSpPr>
+          <p:cNvPr id="5" name="TextBox 4"/>
+          <p:cNvSpPr txBox="1"/>
+          <p:nvPr/>
+        </p:nvSpPr>
+        <p:spPr>
+          <a:xfrm>
+            <a:off x="3931920" y="6355080"/>
+            <a:ext cx="4297680" cy="292608"/>
+          </a:xfrm>
+          <a:prstGeom prst="rect">
+            <a:avLst/>
+          </a:prstGeom>
+          <a:noFill/>
+        </p:spPr>
+        <p:txBody>
+          <a:bodyPr wrap="square" lIns="0" rIns="0" tIns="0" bIns="0">
+            <a:noAutofit/>
+          </a:bodyPr>
+          <a:lstStyle/>
+          <a:p>
+            <a:pPr algn="ctr"/>
+            <a:r>
+              <a:rPr sz="1200" b="0" i="0" u="none">
+                <a:solidFill>
+                  <a:srgbClr val="898989"/>
+                </a:solidFill>
+                <a:latin typeface="Calibri"/>
+              </a:rPr>
+              <a:t>Zeroth Review-2026-27</a:t>
+            </a:r>
+          </a:p>
+        </p:txBody>
+      </p:sp>
+      <p:sp>
+        <p:nvSpPr>
+          <p:cNvPr id="6" name="TextBox 5"/>
+          <p:cNvSpPr txBox="1"/>
+          <p:nvPr/>
+        </p:nvSpPr>
+        <p:spPr>
+          <a:xfrm>
+            <a:off x="10058400" y="6355080"/>
+            <a:ext cx="1204264" cy="292608"/>
+          </a:xfrm>
+          <a:prstGeom prst="rect">
+            <a:avLst/>
+          </a:prstGeom>
+          <a:noFill/>
+        </p:spPr>
+        <p:txBody>
+          <a:bodyPr wrap="square" lIns="0" rIns="0" tIns="0" bIns="0">
+            <a:noAutofit/>
+          </a:bodyPr>
+          <a:lstStyle/>
+          <a:p>
+            <a:pPr algn="r"/>
+            <a:r>
+              <a:rPr sz="1200" b="0" i="0" u="none">
+                <a:solidFill>
+                  <a:srgbClr val="898989"/>
+                </a:solidFill>
+                <a:latin typeface="Calibri"/>
+              </a:rPr>
+              <a:t>7</a:t>
             </a:r>
           </a:p>
         </p:txBody>
@@ -6956,7 +8285,7 @@
 </p:sld>
 </file>
 
-<file path=ppt/slides/slide7.xml><?xml version="1.0" encoding="utf-8"?>
+<file path=ppt/slides/slide8.xml><?xml version="1.0" encoding="utf-8"?>
 <p:sld xmlns:a="http://schemas.openxmlformats.org/drawingml/2006/main" xmlns:p="http://schemas.openxmlformats.org/presentationml/2006/main" xmlns:r="http://schemas.openxmlformats.org/officeDocument/2006/relationships">
   <p:cSld>
     <p:spTree>
@@ -7124,7 +8453,7 @@
                 </a:solidFill>
                 <a:latin typeface="Calibri"/>
               </a:rPr>
-              <a:t>7</a:t>
+              <a:t>8</a:t>
             </a:r>
           </a:p>
         </p:txBody>
@@ -7451,355 +8780,6 @@
 </p:sld>
 </file>
 
-<file path=ppt/slides/slide8.xml><?xml version="1.0" encoding="utf-8"?>
-<p:sld xmlns:a="http://schemas.openxmlformats.org/drawingml/2006/main" xmlns:p="http://schemas.openxmlformats.org/presentationml/2006/main" xmlns:r="http://schemas.openxmlformats.org/officeDocument/2006/relationships">
-  <p:cSld>
-    <p:spTree>
-      <p:nvGrpSpPr>
-        <p:cNvPr id="1" name=""/>
-        <p:cNvGrpSpPr/>
-        <p:nvPr/>
-      </p:nvGrpSpPr>
-      <p:grpSpPr/>
-      <p:pic>
-        <p:nvPicPr>
-          <p:cNvPr id="2" name="Picture 1" descr="logo.png"/>
-          <p:cNvPicPr>
-            <a:picLocks noChangeAspect="1"/>
-          </p:cNvPicPr>
-          <p:nvPr/>
-        </p:nvPicPr>
-        <p:blipFill>
-          <a:blip r:embed="rId2"/>
-          <a:stretch>
-            <a:fillRect/>
-          </a:stretch>
-        </p:blipFill>
-        <p:spPr>
-          <a:xfrm>
-            <a:off x="286207" y="109728"/>
-            <a:ext cx="646480" cy="950976"/>
-          </a:xfrm>
-          <a:prstGeom prst="rect">
-            <a:avLst/>
-          </a:prstGeom>
-        </p:spPr>
-      </p:pic>
-      <p:sp>
-        <p:nvSpPr>
-          <p:cNvPr id="3" name="TextBox 2"/>
-          <p:cNvSpPr txBox="1"/>
-          <p:nvPr/>
-        </p:nvSpPr>
-        <p:spPr>
-          <a:xfrm>
-            <a:off x="1188720" y="384048"/>
-            <a:ext cx="9814255" cy="548640"/>
-          </a:xfrm>
-          <a:prstGeom prst="rect">
-            <a:avLst/>
-          </a:prstGeom>
-          <a:noFill/>
-        </p:spPr>
-        <p:txBody>
-          <a:bodyPr wrap="square" lIns="0" rIns="0" tIns="0" bIns="0">
-            <a:noAutofit/>
-          </a:bodyPr>
-          <a:lstStyle/>
-          <a:p>
-            <a:pPr algn="ctr"/>
-            <a:r>
-              <a:rPr sz="2400" b="1" i="0" u="sng">
-                <a:solidFill>
-                  <a:srgbClr val="000000"/>
-                </a:solidFill>
-                <a:latin typeface="Times New Roman"/>
-              </a:rPr>
-              <a:t>References</a:t>
-            </a:r>
-          </a:p>
-        </p:txBody>
-      </p:sp>
-      <p:sp>
-        <p:nvSpPr>
-          <p:cNvPr id="4" name="TextBox 3"/>
-          <p:cNvSpPr txBox="1"/>
-          <p:nvPr/>
-        </p:nvSpPr>
-        <p:spPr>
-          <a:xfrm>
-            <a:off x="929944" y="6355080"/>
-            <a:ext cx="2286000" cy="292608"/>
-          </a:xfrm>
-          <a:prstGeom prst="rect">
-            <a:avLst/>
-          </a:prstGeom>
-          <a:noFill/>
-        </p:spPr>
-        <p:txBody>
-          <a:bodyPr wrap="square" lIns="0" rIns="0" tIns="0" bIns="0">
-            <a:noAutofit/>
-          </a:bodyPr>
-          <a:lstStyle/>
-          <a:p>
-            <a:r>
-              <a:rPr sz="1200" b="0" i="0" u="none">
-                <a:solidFill>
-                  <a:srgbClr val="898989"/>
-                </a:solidFill>
-                <a:latin typeface="Calibri"/>
-              </a:rPr>
-              <a:t>22-07-2026</a:t>
-            </a:r>
-          </a:p>
-        </p:txBody>
-      </p:sp>
-      <p:sp>
-        <p:nvSpPr>
-          <p:cNvPr id="5" name="TextBox 4"/>
-          <p:cNvSpPr txBox="1"/>
-          <p:nvPr/>
-        </p:nvSpPr>
-        <p:spPr>
-          <a:xfrm>
-            <a:off x="3931920" y="6355080"/>
-            <a:ext cx="4297680" cy="292608"/>
-          </a:xfrm>
-          <a:prstGeom prst="rect">
-            <a:avLst/>
-          </a:prstGeom>
-          <a:noFill/>
-        </p:spPr>
-        <p:txBody>
-          <a:bodyPr wrap="square" lIns="0" rIns="0" tIns="0" bIns="0">
-            <a:noAutofit/>
-          </a:bodyPr>
-          <a:lstStyle/>
-          <a:p>
-            <a:pPr algn="ctr"/>
-            <a:r>
-              <a:rPr sz="1200" b="0" i="0" u="none">
-                <a:solidFill>
-                  <a:srgbClr val="898989"/>
-                </a:solidFill>
-                <a:latin typeface="Calibri"/>
-              </a:rPr>
-              <a:t>Zeroth Review-2026-27</a:t>
-            </a:r>
-          </a:p>
-        </p:txBody>
-      </p:sp>
-      <p:sp>
-        <p:nvSpPr>
-          <p:cNvPr id="6" name="TextBox 5"/>
-          <p:cNvSpPr txBox="1"/>
-          <p:nvPr/>
-        </p:nvSpPr>
-        <p:spPr>
-          <a:xfrm>
-            <a:off x="10058400" y="6355080"/>
-            <a:ext cx="1204264" cy="292608"/>
-          </a:xfrm>
-          <a:prstGeom prst="rect">
-            <a:avLst/>
-          </a:prstGeom>
-          <a:noFill/>
-        </p:spPr>
-        <p:txBody>
-          <a:bodyPr wrap="square" lIns="0" rIns="0" tIns="0" bIns="0">
-            <a:noAutofit/>
-          </a:bodyPr>
-          <a:lstStyle/>
-          <a:p>
-            <a:pPr algn="r"/>
-            <a:r>
-              <a:rPr sz="1200" b="0" i="0" u="none">
-                <a:solidFill>
-                  <a:srgbClr val="898989"/>
-                </a:solidFill>
-                <a:latin typeface="Calibri"/>
-              </a:rPr>
-              <a:t>8</a:t>
-            </a:r>
-          </a:p>
-        </p:txBody>
-      </p:sp>
-      <p:sp>
-        <p:nvSpPr>
-          <p:cNvPr id="7" name="TextBox 6"/>
-          <p:cNvSpPr txBox="1"/>
-          <p:nvPr/>
-        </p:nvSpPr>
-        <p:spPr>
-          <a:xfrm>
-            <a:off x="1168603" y="1389888"/>
-            <a:ext cx="10195560" cy="4754879"/>
-          </a:xfrm>
-          <a:prstGeom prst="rect">
-            <a:avLst/>
-          </a:prstGeom>
-          <a:noFill/>
-        </p:spPr>
-        <p:txBody>
-          <a:bodyPr wrap="square" lIns="0" rIns="0" tIns="0" bIns="0">
-            <a:noAutofit/>
-          </a:bodyPr>
-          <a:lstStyle/>
-          <a:p>
-            <a:pPr marL="384048" indent="-384048">
-              <a:lnSpc>
-                <a:spcPct val="110000"/>
-              </a:lnSpc>
-              <a:spcAft>
-                <a:spcPts val="2000"/>
-              </a:spcAft>
-              <a:buNone/>
-            </a:pPr>
-            <a:r>
-              <a:rPr sz="1400" b="0" i="0" u="none">
-                <a:solidFill>
-                  <a:srgbClr val="000000"/>
-                </a:solidFill>
-                <a:latin typeface="Times New Roman"/>
-              </a:rPr>
-              <a:t>[1]  </a:t>
-            </a:r>
-            <a:r>
-              <a:rPr sz="1400" b="0" i="0" u="none">
-                <a:solidFill>
-                  <a:srgbClr val="000000"/>
-                </a:solidFill>
-                <a:latin typeface="Times New Roman"/>
-              </a:rPr>
-              <a:t>X. Feng, M. Ouyang, X. Liu, L. Lu, Y. Xia and X. He, “Thermal runaway mechanism of lithium ion battery for electric vehicles: A review,” Energy Storage Materials, vol. 10, pp. 246–267, 2018.</a:t>
-            </a:r>
-          </a:p>
-          <a:p>
-            <a:pPr marL="384048" indent="-384048">
-              <a:lnSpc>
-                <a:spcPct val="110000"/>
-              </a:lnSpc>
-              <a:spcAft>
-                <a:spcPts val="2000"/>
-              </a:spcAft>
-              <a:buNone/>
-            </a:pPr>
-            <a:r>
-              <a:rPr sz="1400" b="0" i="0" u="none">
-                <a:solidFill>
-                  <a:srgbClr val="000000"/>
-                </a:solidFill>
-                <a:latin typeface="Times New Roman"/>
-              </a:rPr>
-              <a:t>[2]  </a:t>
-            </a:r>
-            <a:r>
-              <a:rPr sz="1400" b="0" i="0" u="none">
-                <a:solidFill>
-                  <a:srgbClr val="000000"/>
-                </a:solidFill>
-                <a:latin typeface="Times New Roman"/>
-              </a:rPr>
-              <a:t>X. Zhang, S. Chen, J. Zhu et al., “A critical review of thermal runaway prediction and early-warning methods for lithium-ion batteries,” Energy Material Advances, vol. 4, art. 0008, 2023.</a:t>
-            </a:r>
-          </a:p>
-          <a:p>
-            <a:pPr marL="384048" indent="-384048">
-              <a:lnSpc>
-                <a:spcPct val="110000"/>
-              </a:lnSpc>
-              <a:spcAft>
-                <a:spcPts val="2000"/>
-              </a:spcAft>
-              <a:buNone/>
-            </a:pPr>
-            <a:r>
-              <a:rPr sz="1400" b="0" i="0" u="none">
-                <a:solidFill>
-                  <a:srgbClr val="000000"/>
-                </a:solidFill>
-                <a:latin typeface="Times New Roman"/>
-              </a:rPr>
-              <a:t>[3]  </a:t>
-            </a:r>
-            <a:r>
-              <a:rPr sz="1400" b="0" i="0" u="none">
-                <a:solidFill>
-                  <a:srgbClr val="000000"/>
-                </a:solidFill>
-                <a:latin typeface="Times New Roman"/>
-              </a:rPr>
-              <a:t>Q. Chen, Y. He, N. Fang and G. Yu, “A combined data-driven and model-based algorithm for accurate battery thermal runaway warning,” Sensors, vol. 24, no. 15, art. 4964, 2024.</a:t>
-            </a:r>
-          </a:p>
-          <a:p>
-            <a:pPr marL="384048" indent="-384048">
-              <a:lnSpc>
-                <a:spcPct val="110000"/>
-              </a:lnSpc>
-              <a:spcAft>
-                <a:spcPts val="2000"/>
-              </a:spcAft>
-              <a:buNone/>
-            </a:pPr>
-            <a:r>
-              <a:rPr sz="1400" b="0" i="0" u="none">
-                <a:solidFill>
-                  <a:srgbClr val="000000"/>
-                </a:solidFill>
-                <a:latin typeface="Times New Roman"/>
-              </a:rPr>
-              <a:t>[4]  </a:t>
-            </a:r>
-            <a:r>
-              <a:rPr sz="1400" b="0" i="0" u="none">
-                <a:solidFill>
-                  <a:srgbClr val="000000"/>
-                </a:solidFill>
-                <a:latin typeface="Times New Roman"/>
-              </a:rPr>
-              <a:t>A. K. M. A. Habib, M. K. Hasan, G. F. Issa, D. Singh, S. Islam and T. M. Ghazal, “Lithium-ion battery management system for electric vehicles: Constraints, challenges and recommendations,” Batteries, vol. 9, no. 3, art. 152, 2023.</a:t>
-            </a:r>
-          </a:p>
-          <a:p>
-            <a:pPr marL="384048" indent="-384048">
-              <a:lnSpc>
-                <a:spcPct val="110000"/>
-              </a:lnSpc>
-              <a:spcAft>
-                <a:spcPts val="2000"/>
-              </a:spcAft>
-              <a:buNone/>
-            </a:pPr>
-            <a:r>
-              <a:rPr sz="1400" b="0" i="0" u="none">
-                <a:solidFill>
-                  <a:srgbClr val="000000"/>
-                </a:solidFill>
-                <a:latin typeface="Times New Roman"/>
-              </a:rPr>
-              <a:t>[5]  </a:t>
-            </a:r>
-            <a:r>
-              <a:rPr sz="1400" b="0" i="0" u="none">
-                <a:solidFill>
-                  <a:srgbClr val="000000"/>
-                </a:solidFill>
-                <a:latin typeface="Times New Roman"/>
-              </a:rPr>
-              <a:t>IS 16046 (Part 2) : 2018 / IEC 62133-2 : 2017, Secondary cells and batteries containing alkaline or other non-acid electrolytes — Part 2: Lithium systems.</a:t>
-            </a:r>
-          </a:p>
-        </p:txBody>
-      </p:sp>
-    </p:spTree>
-  </p:cSld>
-  <p:clrMapOvr>
-    <a:masterClrMapping/>
-  </p:clrMapOvr>
-</p:sld>
-</file>
-
 <file path=ppt/slides/slide9.xml><?xml version="1.0" encoding="utf-8"?>
 <p:sld xmlns:a="http://schemas.openxmlformats.org/drawingml/2006/main" xmlns:p="http://schemas.openxmlformats.org/presentationml/2006/main" xmlns:r="http://schemas.openxmlformats.org/officeDocument/2006/relationships">
   <p:cSld>
@@ -7842,6 +8822,41 @@
         </p:nvSpPr>
         <p:spPr>
           <a:xfrm>
+            <a:off x="1188720" y="384048"/>
+            <a:ext cx="9814255" cy="548640"/>
+          </a:xfrm>
+          <a:prstGeom prst="rect">
+            <a:avLst/>
+          </a:prstGeom>
+          <a:noFill/>
+        </p:spPr>
+        <p:txBody>
+          <a:bodyPr wrap="square" lIns="0" rIns="0" tIns="0" bIns="0">
+            <a:noAutofit/>
+          </a:bodyPr>
+          <a:lstStyle/>
+          <a:p>
+            <a:pPr algn="ctr"/>
+            <a:r>
+              <a:rPr sz="2400" b="1" i="0" u="sng">
+                <a:solidFill>
+                  <a:srgbClr val="000000"/>
+                </a:solidFill>
+                <a:latin typeface="Times New Roman"/>
+              </a:rPr>
+              <a:t>References</a:t>
+            </a:r>
+          </a:p>
+        </p:txBody>
+      </p:sp>
+      <p:sp>
+        <p:nvSpPr>
+          <p:cNvPr id="4" name="TextBox 3"/>
+          <p:cNvSpPr txBox="1"/>
+          <p:nvPr/>
+        </p:nvSpPr>
+        <p:spPr>
+          <a:xfrm>
             <a:off x="929944" y="6355080"/>
             <a:ext cx="2286000" cy="292608"/>
           </a:xfrm>
@@ -7870,7 +8885,7 @@
       </p:sp>
       <p:sp>
         <p:nvSpPr>
-          <p:cNvPr id="4" name="TextBox 3"/>
+          <p:cNvPr id="5" name="TextBox 4"/>
           <p:cNvSpPr txBox="1"/>
           <p:nvPr/>
         </p:nvSpPr>
@@ -7905,7 +8920,7 @@
       </p:sp>
       <p:sp>
         <p:nvSpPr>
-          <p:cNvPr id="5" name="TextBox 4"/>
+          <p:cNvPr id="6" name="TextBox 5"/>
           <p:cNvSpPr txBox="1"/>
           <p:nvPr/>
         </p:nvSpPr>
@@ -7940,14 +8955,14 @@
       </p:sp>
       <p:sp>
         <p:nvSpPr>
-          <p:cNvPr id="6" name="TextBox 5"/>
+          <p:cNvPr id="7" name="TextBox 6"/>
           <p:cNvSpPr txBox="1"/>
           <p:nvPr/>
         </p:nvSpPr>
         <p:spPr>
           <a:xfrm>
-            <a:off x="1188720" y="2606040"/>
-            <a:ext cx="9814255" cy="1463040"/>
+            <a:off x="1168603" y="1389888"/>
+            <a:ext cx="10195560" cy="4754879"/>
           </a:xfrm>
           <a:prstGeom prst="rect">
             <a:avLst/>
@@ -7960,39 +8975,148 @@
           </a:bodyPr>
           <a:lstStyle/>
           <a:p>
-            <a:pPr algn="ctr"/>
-            <a:r>
-              <a:rPr sz="4000" b="1" i="0" u="none">
+            <a:pPr marL="384048" indent="-384048">
+              <a:lnSpc>
+                <a:spcPct val="110000"/>
+              </a:lnSpc>
+              <a:spcAft>
+                <a:spcPts val="2000"/>
+              </a:spcAft>
+              <a:buNone/>
+            </a:pPr>
+            <a:r>
+              <a:rPr sz="1400" b="0" i="0" u="none">
                 <a:solidFill>
                   <a:srgbClr val="000000"/>
                 </a:solidFill>
                 <a:latin typeface="Times New Roman"/>
               </a:rPr>
-              <a:t>Thank You</a:t>
-            </a:r>
-          </a:p>
-          <a:p>
-            <a:pPr algn="ctr"/>
-            <a:r>
-              <a:rPr sz="1800" b="0" i="0" u="none">
+              <a:t>[1]  </a:t>
+            </a:r>
+            <a:r>
+              <a:rPr sz="1400" b="0" i="0" u="none">
                 <a:solidFill>
                   <a:srgbClr val="000000"/>
                 </a:solidFill>
                 <a:latin typeface="Times New Roman"/>
               </a:rPr>
-              <a:t/>
-            </a:r>
-          </a:p>
-          <a:p>
-            <a:pPr algn="ctr"/>
-            <a:r>
-              <a:rPr sz="2000" b="0" i="0" u="none">
-                <a:solidFill>
-                  <a:srgbClr val="002060"/>
+              <a:t>X. Feng, M. Ouyang, X. Liu, L. Lu, Y. Xia and X. He, “Thermal runaway mechanism of lithium ion battery for electric vehicles: A review,” Energy Storage Materials, vol. 10, pp. 246–267, 2018.</a:t>
+            </a:r>
+          </a:p>
+          <a:p>
+            <a:pPr marL="384048" indent="-384048">
+              <a:lnSpc>
+                <a:spcPct val="110000"/>
+              </a:lnSpc>
+              <a:spcAft>
+                <a:spcPts val="2000"/>
+              </a:spcAft>
+              <a:buNone/>
+            </a:pPr>
+            <a:r>
+              <a:rPr sz="1400" b="0" i="0" u="none">
+                <a:solidFill>
+                  <a:srgbClr val="000000"/>
                 </a:solidFill>
                 <a:latin typeface="Times New Roman"/>
               </a:rPr>
-              <a:t>Questions are welcome</a:t>
+              <a:t>[2]  </a:t>
+            </a:r>
+            <a:r>
+              <a:rPr sz="1400" b="0" i="0" u="none">
+                <a:solidFill>
+                  <a:srgbClr val="000000"/>
+                </a:solidFill>
+                <a:latin typeface="Times New Roman"/>
+              </a:rPr>
+              <a:t>X. Zhang, S. Chen, J. Zhu et al., “A critical review of thermal runaway prediction and early-warning methods for lithium-ion batteries,” Energy Material Advances, vol. 4, art. 0008, 2023.</a:t>
+            </a:r>
+          </a:p>
+          <a:p>
+            <a:pPr marL="384048" indent="-384048">
+              <a:lnSpc>
+                <a:spcPct val="110000"/>
+              </a:lnSpc>
+              <a:spcAft>
+                <a:spcPts val="2000"/>
+              </a:spcAft>
+              <a:buNone/>
+            </a:pPr>
+            <a:r>
+              <a:rPr sz="1400" b="0" i="0" u="none">
+                <a:solidFill>
+                  <a:srgbClr val="000000"/>
+                </a:solidFill>
+                <a:latin typeface="Times New Roman"/>
+              </a:rPr>
+              <a:t>[3]  </a:t>
+            </a:r>
+            <a:r>
+              <a:rPr sz="1400" b="0" i="0" u="none">
+                <a:solidFill>
+                  <a:srgbClr val="000000"/>
+                </a:solidFill>
+                <a:latin typeface="Times New Roman"/>
+              </a:rPr>
+              <a:t>Q. Chen, Y. He, N. Fang and G. Yu, “A combined data-driven and model-based algorithm for accurate battery thermal runaway warning,” Sensors, vol. 24, no. 15, art. 4964, 2024.</a:t>
+            </a:r>
+          </a:p>
+          <a:p>
+            <a:pPr marL="384048" indent="-384048">
+              <a:lnSpc>
+                <a:spcPct val="110000"/>
+              </a:lnSpc>
+              <a:spcAft>
+                <a:spcPts val="2000"/>
+              </a:spcAft>
+              <a:buNone/>
+            </a:pPr>
+            <a:r>
+              <a:rPr sz="1400" b="0" i="0" u="none">
+                <a:solidFill>
+                  <a:srgbClr val="000000"/>
+                </a:solidFill>
+                <a:latin typeface="Times New Roman"/>
+              </a:rPr>
+              <a:t>[4]  </a:t>
+            </a:r>
+            <a:r>
+              <a:rPr sz="1400" b="0" i="0" u="none">
+                <a:solidFill>
+                  <a:srgbClr val="000000"/>
+                </a:solidFill>
+                <a:latin typeface="Times New Roman"/>
+              </a:rPr>
+              <a:t>A. K. M. A. Habib, M. K. Hasan, G. F. Issa, D. Singh, S. Islam and T. M. Ghazal, “Lithium-ion battery management system for electric vehicles: Constraints, challenges and recommendations,” Batteries, vol. 9, no. 3, art. 152, 2023.</a:t>
+            </a:r>
+          </a:p>
+          <a:p>
+            <a:pPr marL="384048" indent="-384048">
+              <a:lnSpc>
+                <a:spcPct val="110000"/>
+              </a:lnSpc>
+              <a:spcAft>
+                <a:spcPts val="2000"/>
+              </a:spcAft>
+              <a:buNone/>
+            </a:pPr>
+            <a:r>
+              <a:rPr sz="1400" b="0" i="0" u="none">
+                <a:solidFill>
+                  <a:srgbClr val="000000"/>
+                </a:solidFill>
+                <a:latin typeface="Times New Roman"/>
+              </a:rPr>
+              <a:t>[5]  </a:t>
+            </a:r>
+            <a:r>
+              <a:rPr sz="1400" b="0" i="0" u="none">
+                <a:solidFill>
+                  <a:srgbClr val="000000"/>
+                </a:solidFill>
+                <a:latin typeface="Times New Roman"/>
+              </a:rPr>
+              <a:t>IS 16046 (Part 2) : 2018 / IEC 62133-2 : 2017, Secondary cells and batteries containing alkaline or other non-acid electrolytes — Part 2: Lithium systems.</a:t>
             </a:r>
           </a:p>
         </p:txBody>
